--- a/game-of-the-month/game/gom_template.pptx
+++ b/game-of-the-month/game/gom_template.pptx
@@ -196,7 +196,7 @@
           <a:p>
             <a:fld id="{8D517CBF-9E62-4245-8513-D7E93171A324}" type="datetimeFigureOut">
               <a:rPr lang="en-US" smtClean="0"/>
-              <a:t>6/30/26</a:t>
+              <a:t>9/8/26</a:t>
             </a:fld>
             <a:endParaRPr lang="en-US"/>
           </a:p>
@@ -692,7 +692,7 @@
           <a:p>
             <a:fld id="{1D8BD707-D9CF-40AE-B4C6-C98DA3205C09}" type="datetimeFigureOut">
               <a:rPr lang="en-US"/>
-              <a:t>6/30/26</a:t>
+              <a:t>9/8/26</a:t>
             </a:fld>
             <a:endParaRPr lang="en-US"/>
           </a:p>
@@ -863,7 +863,7 @@
           <a:p>
             <a:fld id="{1D8BD707-D9CF-40AE-B4C6-C98DA3205C09}" type="datetimeFigureOut">
               <a:rPr lang="en-US"/>
-              <a:t>6/30/26</a:t>
+              <a:t>9/8/26</a:t>
             </a:fld>
             <a:endParaRPr lang="en-US"/>
           </a:p>
@@ -1077,7 +1077,7 @@
           <a:p>
             <a:fld id="{1D8BD707-D9CF-40AE-B4C6-C98DA3205C09}" type="datetimeFigureOut">
               <a:rPr lang="en-US"/>
-              <a:t>6/30/26</a:t>
+              <a:t>9/8/26</a:t>
             </a:fld>
             <a:endParaRPr lang="en-US"/>
           </a:p>
@@ -1225,7 +1225,7 @@
           <a:p>
             <a:fld id="{1D8BD707-D9CF-40AE-B4C6-C98DA3205C09}" type="datetimeFigureOut">
               <a:rPr lang="en-US"/>
-              <a:t>6/30/26</a:t>
+              <a:t>9/8/26</a:t>
             </a:fld>
             <a:endParaRPr lang="en-US"/>
           </a:p>
@@ -1344,7 +1344,7 @@
           <a:p>
             <a:fld id="{1D8BD707-D9CF-40AE-B4C6-C98DA3205C09}" type="datetimeFigureOut">
               <a:rPr lang="en-US"/>
-              <a:t>6/30/26</a:t>
+              <a:t>9/8/26</a:t>
             </a:fld>
             <a:endParaRPr lang="en-US"/>
           </a:p>
@@ -1651,7 +1651,7 @@
           <a:p>
             <a:fld id="{1D8BD707-D9CF-40AE-B4C6-C98DA3205C09}" type="datetimeFigureOut">
               <a:rPr lang="en-US"/>
-              <a:t>6/30/26</a:t>
+              <a:t>9/8/26</a:t>
             </a:fld>
             <a:endParaRPr lang="en-US"/>
           </a:p>
@@ -1878,8 +1878,8 @@
         </p:nvSpPr>
         <p:spPr>
           <a:xfrm>
-            <a:off x="4132739" y="5774159"/>
-            <a:ext cx="6974840" cy="1722908"/>
+            <a:off x="4132739" y="6045200"/>
+            <a:ext cx="6974840" cy="1294446"/>
           </a:xfrm>
           <a:prstGeom prst="rect">
             <a:avLst/>
@@ -5700,34 +5700,14 @@
               <a:t> </a:t>
             </a:r>
             <a:r>
-              <a:rPr sz="2950" b="1" spc="270" dirty="0">
+              <a:rPr lang="en-US" sz="2950" b="1" spc="270" dirty="0">
                 <a:solidFill>
                   <a:srgbClr val="FFFFFF"/>
                 </a:solidFill>
                 <a:latin typeface="Franklin Gothic Medium" panose="020B0603020102020204" pitchFamily="34" charset="0"/>
                 <a:cs typeface="Century Gothic"/>
               </a:rPr>
-              <a:t>ROUND</a:t>
-            </a:r>
-            <a:r>
-              <a:rPr sz="2950" b="1" spc="60" dirty="0">
-                <a:solidFill>
-                  <a:srgbClr val="FFFFFF"/>
-                </a:solidFill>
-                <a:latin typeface="Franklin Gothic Medium" panose="020B0603020102020204" pitchFamily="34" charset="0"/>
-                <a:cs typeface="Century Gothic"/>
-              </a:rPr>
-              <a:t> </a:t>
-            </a:r>
-            <a:r>
-              <a:rPr lang="en-US" sz="2950" b="1" spc="60" dirty="0">
-                <a:solidFill>
-                  <a:srgbClr val="FFFFFF"/>
-                </a:solidFill>
-                <a:latin typeface="Franklin Gothic Medium" panose="020B0603020102020204" pitchFamily="34" charset="0"/>
-                <a:cs typeface="Century Gothic"/>
-              </a:rPr>
-              <a:t>1</a:t>
+              <a:t>FINALS</a:t>
             </a:r>
             <a:endParaRPr sz="2950" dirty="0">
               <a:latin typeface="Franklin Gothic Medium" panose="020B0603020102020204" pitchFamily="34" charset="0"/>
@@ -5736,1469 +5716,1454 @@
           </a:p>
         </p:txBody>
       </p:sp>
-      <p:grpSp>
-        <p:nvGrpSpPr>
-          <p:cNvPr id="16" name="object 16"/>
-          <p:cNvGrpSpPr/>
+      <p:sp>
+        <p:nvSpPr>
+          <p:cNvPr id="17" name="object 17"/>
+          <p:cNvSpPr/>
           <p:nvPr/>
-        </p:nvGrpSpPr>
-        <p:grpSpPr>
+        </p:nvSpPr>
+        <p:spPr>
           <a:xfrm>
-            <a:off x="4159608" y="1785767"/>
-            <a:ext cx="6920865" cy="3695700"/>
-            <a:chOff x="4159608" y="1785767"/>
-            <a:chExt cx="6920865" cy="3695700"/>
+            <a:off x="4249356" y="1785772"/>
+            <a:ext cx="702310" cy="680085"/>
           </a:xfrm>
-        </p:grpSpPr>
-        <p:sp>
-          <p:nvSpPr>
-            <p:cNvPr id="17" name="object 17"/>
-            <p:cNvSpPr/>
-            <p:nvPr/>
-          </p:nvSpPr>
-          <p:spPr>
-            <a:xfrm>
-              <a:off x="4249356" y="1785772"/>
-              <a:ext cx="702310" cy="680085"/>
-            </a:xfrm>
-            <a:custGeom>
-              <a:avLst/>
-              <a:gdLst/>
-              <a:ahLst/>
-              <a:cxnLst/>
-              <a:rect l="l" t="t" r="r" b="b"/>
-              <a:pathLst>
-                <a:path w="702310" h="680085">
-                  <a:moveTo>
-                    <a:pt x="104330" y="0"/>
-                  </a:moveTo>
-                  <a:lnTo>
-                    <a:pt x="52171" y="0"/>
-                  </a:lnTo>
-                  <a:lnTo>
-                    <a:pt x="52171" y="52158"/>
-                  </a:lnTo>
-                  <a:lnTo>
-                    <a:pt x="104330" y="52158"/>
-                  </a:lnTo>
-                  <a:lnTo>
-                    <a:pt x="104330" y="0"/>
-                  </a:lnTo>
-                  <a:close/>
-                </a:path>
-                <a:path w="702310" h="680085">
-                  <a:moveTo>
-                    <a:pt x="423557" y="126022"/>
-                  </a:moveTo>
-                  <a:lnTo>
-                    <a:pt x="385724" y="125590"/>
-                  </a:lnTo>
-                  <a:lnTo>
-                    <a:pt x="393319" y="127939"/>
-                  </a:lnTo>
-                  <a:lnTo>
-                    <a:pt x="404190" y="132054"/>
-                  </a:lnTo>
-                  <a:lnTo>
-                    <a:pt x="410108" y="134581"/>
-                  </a:lnTo>
-                  <a:lnTo>
-                    <a:pt x="412343" y="135585"/>
-                  </a:lnTo>
-                  <a:lnTo>
-                    <a:pt x="414934" y="132054"/>
-                  </a:lnTo>
-                  <a:lnTo>
-                    <a:pt x="418426" y="128917"/>
-                  </a:lnTo>
-                  <a:lnTo>
-                    <a:pt x="423557" y="126022"/>
-                  </a:lnTo>
-                  <a:close/>
-                </a:path>
-                <a:path w="702310" h="680085">
-                  <a:moveTo>
-                    <a:pt x="649554" y="522376"/>
-                  </a:moveTo>
-                  <a:lnTo>
-                    <a:pt x="597382" y="522376"/>
-                  </a:lnTo>
-                  <a:lnTo>
-                    <a:pt x="597382" y="574548"/>
-                  </a:lnTo>
-                  <a:lnTo>
-                    <a:pt x="649554" y="574548"/>
-                  </a:lnTo>
-                  <a:lnTo>
-                    <a:pt x="649554" y="522376"/>
-                  </a:lnTo>
-                  <a:close/>
-                </a:path>
-                <a:path w="702310" h="680085">
-                  <a:moveTo>
-                    <a:pt x="689927" y="64820"/>
-                  </a:moveTo>
-                  <a:lnTo>
-                    <a:pt x="665619" y="58470"/>
-                  </a:lnTo>
-                  <a:lnTo>
-                    <a:pt x="599287" y="47040"/>
-                  </a:lnTo>
-                  <a:lnTo>
-                    <a:pt x="500773" y="34340"/>
-                  </a:lnTo>
-                  <a:lnTo>
-                    <a:pt x="488454" y="33832"/>
-                  </a:lnTo>
-                  <a:lnTo>
-                    <a:pt x="488454" y="542340"/>
-                  </a:lnTo>
-                  <a:lnTo>
-                    <a:pt x="255054" y="542340"/>
-                  </a:lnTo>
-                  <a:lnTo>
-                    <a:pt x="256540" y="535990"/>
-                  </a:lnTo>
-                  <a:lnTo>
-                    <a:pt x="260591" y="529640"/>
-                  </a:lnTo>
-                  <a:lnTo>
-                    <a:pt x="266598" y="524560"/>
-                  </a:lnTo>
-                  <a:lnTo>
-                    <a:pt x="273977" y="523290"/>
-                  </a:lnTo>
-                  <a:lnTo>
-                    <a:pt x="469531" y="523290"/>
-                  </a:lnTo>
-                  <a:lnTo>
-                    <a:pt x="476897" y="524560"/>
-                  </a:lnTo>
-                  <a:lnTo>
-                    <a:pt x="482904" y="529640"/>
-                  </a:lnTo>
-                  <a:lnTo>
-                    <a:pt x="486956" y="535990"/>
-                  </a:lnTo>
-                  <a:lnTo>
-                    <a:pt x="488454" y="542340"/>
-                  </a:lnTo>
-                  <a:lnTo>
-                    <a:pt x="488454" y="33832"/>
-                  </a:lnTo>
-                  <a:lnTo>
-                    <a:pt x="477177" y="33350"/>
-                  </a:lnTo>
-                  <a:lnTo>
-                    <a:pt x="477177" y="515670"/>
-                  </a:lnTo>
-                  <a:lnTo>
-                    <a:pt x="266344" y="515670"/>
-                  </a:lnTo>
-                  <a:lnTo>
-                    <a:pt x="267830" y="508050"/>
-                  </a:lnTo>
-                  <a:lnTo>
-                    <a:pt x="271881" y="501700"/>
-                  </a:lnTo>
-                  <a:lnTo>
-                    <a:pt x="277888" y="497890"/>
-                  </a:lnTo>
-                  <a:lnTo>
-                    <a:pt x="285267" y="496620"/>
-                  </a:lnTo>
-                  <a:lnTo>
-                    <a:pt x="458241" y="496620"/>
-                  </a:lnTo>
-                  <a:lnTo>
-                    <a:pt x="465607" y="497890"/>
-                  </a:lnTo>
-                  <a:lnTo>
-                    <a:pt x="471627" y="501700"/>
-                  </a:lnTo>
-                  <a:lnTo>
-                    <a:pt x="475678" y="508050"/>
-                  </a:lnTo>
-                  <a:lnTo>
-                    <a:pt x="477177" y="515670"/>
-                  </a:lnTo>
-                  <a:lnTo>
-                    <a:pt x="477177" y="33350"/>
-                  </a:lnTo>
-                  <a:lnTo>
-                    <a:pt x="476846" y="33337"/>
-                  </a:lnTo>
-                  <a:lnTo>
-                    <a:pt x="476846" y="151180"/>
-                  </a:lnTo>
-                  <a:lnTo>
-                    <a:pt x="473252" y="163880"/>
-                  </a:lnTo>
-                  <a:lnTo>
-                    <a:pt x="468909" y="172770"/>
-                  </a:lnTo>
-                  <a:lnTo>
-                    <a:pt x="466813" y="177850"/>
-                  </a:lnTo>
-                  <a:lnTo>
-                    <a:pt x="466813" y="174040"/>
-                  </a:lnTo>
-                  <a:lnTo>
-                    <a:pt x="465886" y="172402"/>
-                  </a:lnTo>
-                  <a:lnTo>
-                    <a:pt x="465886" y="481380"/>
-                  </a:lnTo>
-                  <a:lnTo>
-                    <a:pt x="465886" y="489000"/>
-                  </a:lnTo>
-                  <a:lnTo>
-                    <a:pt x="277622" y="489000"/>
-                  </a:lnTo>
-                  <a:lnTo>
-                    <a:pt x="277622" y="481380"/>
-                  </a:lnTo>
-                  <a:lnTo>
-                    <a:pt x="281724" y="475030"/>
-                  </a:lnTo>
-                  <a:lnTo>
-                    <a:pt x="287731" y="471220"/>
-                  </a:lnTo>
-                  <a:lnTo>
-                    <a:pt x="298729" y="462330"/>
-                  </a:lnTo>
-                  <a:lnTo>
-                    <a:pt x="307251" y="450900"/>
-                  </a:lnTo>
-                  <a:lnTo>
-                    <a:pt x="312788" y="436930"/>
-                  </a:lnTo>
-                  <a:lnTo>
-                    <a:pt x="314782" y="421690"/>
-                  </a:lnTo>
-                  <a:lnTo>
-                    <a:pt x="428726" y="421690"/>
-                  </a:lnTo>
-                  <a:lnTo>
-                    <a:pt x="444766" y="462330"/>
-                  </a:lnTo>
-                  <a:lnTo>
-                    <a:pt x="461784" y="475030"/>
-                  </a:lnTo>
-                  <a:lnTo>
-                    <a:pt x="465886" y="481380"/>
-                  </a:lnTo>
-                  <a:lnTo>
-                    <a:pt x="465886" y="172402"/>
-                  </a:lnTo>
-                  <a:lnTo>
-                    <a:pt x="465378" y="171500"/>
-                  </a:lnTo>
-                  <a:lnTo>
-                    <a:pt x="463384" y="168960"/>
-                  </a:lnTo>
-                  <a:lnTo>
-                    <a:pt x="461721" y="167386"/>
-                  </a:lnTo>
-                  <a:lnTo>
-                    <a:pt x="461721" y="265480"/>
-                  </a:lnTo>
-                  <a:lnTo>
-                    <a:pt x="456336" y="303580"/>
-                  </a:lnTo>
-                  <a:lnTo>
-                    <a:pt x="445058" y="335330"/>
-                  </a:lnTo>
-                  <a:lnTo>
-                    <a:pt x="433895" y="369620"/>
-                  </a:lnTo>
-                  <a:lnTo>
-                    <a:pt x="428904" y="414070"/>
-                  </a:lnTo>
-                  <a:lnTo>
-                    <a:pt x="318681" y="414070"/>
-                  </a:lnTo>
-                  <a:lnTo>
-                    <a:pt x="362115" y="362000"/>
-                  </a:lnTo>
-                  <a:lnTo>
-                    <a:pt x="374840" y="346760"/>
-                  </a:lnTo>
-                  <a:lnTo>
-                    <a:pt x="376643" y="344220"/>
-                  </a:lnTo>
-                  <a:lnTo>
-                    <a:pt x="376643" y="275640"/>
-                  </a:lnTo>
-                  <a:lnTo>
-                    <a:pt x="384035" y="266750"/>
-                  </a:lnTo>
-                  <a:lnTo>
-                    <a:pt x="389496" y="256590"/>
-                  </a:lnTo>
-                  <a:lnTo>
-                    <a:pt x="392874" y="245160"/>
-                  </a:lnTo>
-                  <a:lnTo>
-                    <a:pt x="394030" y="233730"/>
-                  </a:lnTo>
-                  <a:lnTo>
-                    <a:pt x="393395" y="227380"/>
-                  </a:lnTo>
-                  <a:lnTo>
-                    <a:pt x="393268" y="226110"/>
-                  </a:lnTo>
-                  <a:lnTo>
-                    <a:pt x="393141" y="224840"/>
-                  </a:lnTo>
-                  <a:lnTo>
-                    <a:pt x="393014" y="223570"/>
-                  </a:lnTo>
-                  <a:lnTo>
-                    <a:pt x="390118" y="213410"/>
-                  </a:lnTo>
-                  <a:lnTo>
-                    <a:pt x="386283" y="206019"/>
-                  </a:lnTo>
-                  <a:lnTo>
-                    <a:pt x="386283" y="233730"/>
-                  </a:lnTo>
-                  <a:lnTo>
-                    <a:pt x="385051" y="245160"/>
-                  </a:lnTo>
-                  <a:lnTo>
-                    <a:pt x="381571" y="255320"/>
-                  </a:lnTo>
-                  <a:lnTo>
-                    <a:pt x="376097" y="264210"/>
-                  </a:lnTo>
-                  <a:lnTo>
-                    <a:pt x="368896" y="271830"/>
-                  </a:lnTo>
-                  <a:lnTo>
-                    <a:pt x="368896" y="341680"/>
-                  </a:lnTo>
-                  <a:lnTo>
-                    <a:pt x="351980" y="362000"/>
-                  </a:lnTo>
-                  <a:lnTo>
-                    <a:pt x="351980" y="266750"/>
-                  </a:lnTo>
-                  <a:lnTo>
-                    <a:pt x="360514" y="260400"/>
-                  </a:lnTo>
-                  <a:lnTo>
-                    <a:pt x="367068" y="254050"/>
-                  </a:lnTo>
-                  <a:lnTo>
-                    <a:pt x="371284" y="243890"/>
-                  </a:lnTo>
-                  <a:lnTo>
-                    <a:pt x="372770" y="233730"/>
-                  </a:lnTo>
-                  <a:lnTo>
-                    <a:pt x="372719" y="232460"/>
-                  </a:lnTo>
-                  <a:lnTo>
-                    <a:pt x="374624" y="231190"/>
-                  </a:lnTo>
-                  <a:lnTo>
-                    <a:pt x="376123" y="229920"/>
-                  </a:lnTo>
-                  <a:lnTo>
-                    <a:pt x="376948" y="227380"/>
-                  </a:lnTo>
-                  <a:lnTo>
-                    <a:pt x="385787" y="227380"/>
-                  </a:lnTo>
-                  <a:lnTo>
-                    <a:pt x="386118" y="229920"/>
-                  </a:lnTo>
-                  <a:lnTo>
-                    <a:pt x="386194" y="231190"/>
-                  </a:lnTo>
-                  <a:lnTo>
-                    <a:pt x="386283" y="233730"/>
-                  </a:lnTo>
-                  <a:lnTo>
-                    <a:pt x="386283" y="206019"/>
-                  </a:lnTo>
-                  <a:lnTo>
-                    <a:pt x="385508" y="204520"/>
-                  </a:lnTo>
-                  <a:lnTo>
-                    <a:pt x="384009" y="202653"/>
-                  </a:lnTo>
-                  <a:lnTo>
-                    <a:pt x="384009" y="219760"/>
-                  </a:lnTo>
-                  <a:lnTo>
-                    <a:pt x="376948" y="219760"/>
-                  </a:lnTo>
-                  <a:lnTo>
-                    <a:pt x="375386" y="215950"/>
-                  </a:lnTo>
-                  <a:lnTo>
-                    <a:pt x="371411" y="212140"/>
-                  </a:lnTo>
-                  <a:lnTo>
-                    <a:pt x="369912" y="212140"/>
-                  </a:lnTo>
-                  <a:lnTo>
-                    <a:pt x="369912" y="224840"/>
-                  </a:lnTo>
-                  <a:lnTo>
-                    <a:pt x="368515" y="226110"/>
-                  </a:lnTo>
-                  <a:lnTo>
-                    <a:pt x="365023" y="226110"/>
-                  </a:lnTo>
-                  <a:lnTo>
-                    <a:pt x="365023" y="233730"/>
-                  </a:lnTo>
-                  <a:lnTo>
-                    <a:pt x="363702" y="242620"/>
-                  </a:lnTo>
-                  <a:lnTo>
-                    <a:pt x="359994" y="250240"/>
-                  </a:lnTo>
-                  <a:lnTo>
-                    <a:pt x="354241" y="256590"/>
-                  </a:lnTo>
-                  <a:lnTo>
-                    <a:pt x="346811" y="260400"/>
-                  </a:lnTo>
-                  <a:lnTo>
-                    <a:pt x="344233" y="261670"/>
-                  </a:lnTo>
-                  <a:lnTo>
-                    <a:pt x="344233" y="370890"/>
-                  </a:lnTo>
-                  <a:lnTo>
-                    <a:pt x="315658" y="405180"/>
-                  </a:lnTo>
-                  <a:lnTo>
-                    <a:pt x="250583" y="489000"/>
-                  </a:lnTo>
-                  <a:lnTo>
-                    <a:pt x="256590" y="440740"/>
-                  </a:lnTo>
-                  <a:lnTo>
-                    <a:pt x="267512" y="426770"/>
-                  </a:lnTo>
-                  <a:lnTo>
-                    <a:pt x="309270" y="373430"/>
-                  </a:lnTo>
-                  <a:lnTo>
-                    <a:pt x="316903" y="373430"/>
-                  </a:lnTo>
-                  <a:lnTo>
-                    <a:pt x="317119" y="372160"/>
-                  </a:lnTo>
-                  <a:lnTo>
-                    <a:pt x="318300" y="372160"/>
-                  </a:lnTo>
-                  <a:lnTo>
-                    <a:pt x="319189" y="370890"/>
-                  </a:lnTo>
-                  <a:lnTo>
-                    <a:pt x="320141" y="370890"/>
-                  </a:lnTo>
-                  <a:lnTo>
-                    <a:pt x="320725" y="369620"/>
-                  </a:lnTo>
-                  <a:lnTo>
-                    <a:pt x="322173" y="368350"/>
-                  </a:lnTo>
-                  <a:lnTo>
-                    <a:pt x="322199" y="365810"/>
-                  </a:lnTo>
-                  <a:lnTo>
-                    <a:pt x="322275" y="359460"/>
-                  </a:lnTo>
-                  <a:lnTo>
-                    <a:pt x="322300" y="358190"/>
-                  </a:lnTo>
-                  <a:lnTo>
-                    <a:pt x="322122" y="358190"/>
-                  </a:lnTo>
-                  <a:lnTo>
-                    <a:pt x="321792" y="356920"/>
-                  </a:lnTo>
-                  <a:lnTo>
-                    <a:pt x="321221" y="356920"/>
-                  </a:lnTo>
-                  <a:lnTo>
-                    <a:pt x="320497" y="355650"/>
-                  </a:lnTo>
-                  <a:lnTo>
-                    <a:pt x="319227" y="354380"/>
-                  </a:lnTo>
-                  <a:lnTo>
-                    <a:pt x="318325" y="353110"/>
-                  </a:lnTo>
-                  <a:lnTo>
-                    <a:pt x="315887" y="353110"/>
-                  </a:lnTo>
-                  <a:lnTo>
-                    <a:pt x="315607" y="351840"/>
-                  </a:lnTo>
-                  <a:lnTo>
-                    <a:pt x="315582" y="360730"/>
-                  </a:lnTo>
-                  <a:lnTo>
-                    <a:pt x="315582" y="363270"/>
-                  </a:lnTo>
-                  <a:lnTo>
-                    <a:pt x="315341" y="364540"/>
-                  </a:lnTo>
-                  <a:lnTo>
-                    <a:pt x="314667" y="364540"/>
-                  </a:lnTo>
-                  <a:lnTo>
-                    <a:pt x="314515" y="365810"/>
-                  </a:lnTo>
-                  <a:lnTo>
-                    <a:pt x="310502" y="365810"/>
-                  </a:lnTo>
-                  <a:lnTo>
-                    <a:pt x="309791" y="364540"/>
-                  </a:lnTo>
-                  <a:lnTo>
-                    <a:pt x="309308" y="363270"/>
-                  </a:lnTo>
-                  <a:lnTo>
-                    <a:pt x="309308" y="362000"/>
-                  </a:lnTo>
-                  <a:lnTo>
-                    <a:pt x="309549" y="362000"/>
-                  </a:lnTo>
-                  <a:lnTo>
-                    <a:pt x="310540" y="360730"/>
-                  </a:lnTo>
-                  <a:lnTo>
-                    <a:pt x="311429" y="359460"/>
-                  </a:lnTo>
-                  <a:lnTo>
-                    <a:pt x="314172" y="359460"/>
-                  </a:lnTo>
-                  <a:lnTo>
-                    <a:pt x="315582" y="360730"/>
-                  </a:lnTo>
-                  <a:lnTo>
-                    <a:pt x="315582" y="351840"/>
-                  </a:lnTo>
-                  <a:lnTo>
-                    <a:pt x="306438" y="351840"/>
-                  </a:lnTo>
-                  <a:lnTo>
-                    <a:pt x="301561" y="356920"/>
-                  </a:lnTo>
-                  <a:lnTo>
-                    <a:pt x="301561" y="364540"/>
-                  </a:lnTo>
-                  <a:lnTo>
-                    <a:pt x="302133" y="367080"/>
-                  </a:lnTo>
-                  <a:lnTo>
-                    <a:pt x="303161" y="368350"/>
-                  </a:lnTo>
-                  <a:lnTo>
-                    <a:pt x="258521" y="426770"/>
-                  </a:lnTo>
-                  <a:lnTo>
-                    <a:pt x="264071" y="382320"/>
-                  </a:lnTo>
-                  <a:lnTo>
-                    <a:pt x="275628" y="367080"/>
-                  </a:lnTo>
-                  <a:lnTo>
-                    <a:pt x="309372" y="322630"/>
-                  </a:lnTo>
-                  <a:lnTo>
-                    <a:pt x="317627" y="322630"/>
-                  </a:lnTo>
-                  <a:lnTo>
-                    <a:pt x="317792" y="321360"/>
-                  </a:lnTo>
-                  <a:lnTo>
-                    <a:pt x="319481" y="321360"/>
-                  </a:lnTo>
-                  <a:lnTo>
-                    <a:pt x="320192" y="320090"/>
-                  </a:lnTo>
-                  <a:lnTo>
-                    <a:pt x="320700" y="320090"/>
-                  </a:lnTo>
-                  <a:lnTo>
-                    <a:pt x="321259" y="318820"/>
-                  </a:lnTo>
-                  <a:lnTo>
-                    <a:pt x="321564" y="318820"/>
-                  </a:lnTo>
-                  <a:lnTo>
-                    <a:pt x="322008" y="317550"/>
-                  </a:lnTo>
-                  <a:lnTo>
-                    <a:pt x="321970" y="315010"/>
-                  </a:lnTo>
-                  <a:lnTo>
-                    <a:pt x="321919" y="309930"/>
-                  </a:lnTo>
-                  <a:lnTo>
-                    <a:pt x="321894" y="307390"/>
-                  </a:lnTo>
-                  <a:lnTo>
-                    <a:pt x="321627" y="306120"/>
-                  </a:lnTo>
-                  <a:lnTo>
-                    <a:pt x="320992" y="306120"/>
-                  </a:lnTo>
-                  <a:lnTo>
-                    <a:pt x="320611" y="304850"/>
-                  </a:lnTo>
-                  <a:lnTo>
-                    <a:pt x="319633" y="304850"/>
-                  </a:lnTo>
-                  <a:lnTo>
-                    <a:pt x="319506" y="303580"/>
-                  </a:lnTo>
-                  <a:lnTo>
-                    <a:pt x="317957" y="303580"/>
-                  </a:lnTo>
-                  <a:lnTo>
-                    <a:pt x="316788" y="302310"/>
-                  </a:lnTo>
-                  <a:lnTo>
-                    <a:pt x="315099" y="302310"/>
-                  </a:lnTo>
-                  <a:lnTo>
-                    <a:pt x="315099" y="311200"/>
-                  </a:lnTo>
-                  <a:lnTo>
-                    <a:pt x="314998" y="313740"/>
-                  </a:lnTo>
-                  <a:lnTo>
-                    <a:pt x="314896" y="315010"/>
-                  </a:lnTo>
-                  <a:lnTo>
-                    <a:pt x="310718" y="315010"/>
-                  </a:lnTo>
-                  <a:lnTo>
-                    <a:pt x="309308" y="313740"/>
-                  </a:lnTo>
-                  <a:lnTo>
-                    <a:pt x="309308" y="312470"/>
-                  </a:lnTo>
-                  <a:lnTo>
-                    <a:pt x="309892" y="311200"/>
-                  </a:lnTo>
-                  <a:lnTo>
-                    <a:pt x="310362" y="309930"/>
-                  </a:lnTo>
-                  <a:lnTo>
-                    <a:pt x="314769" y="309930"/>
-                  </a:lnTo>
-                  <a:lnTo>
-                    <a:pt x="315099" y="311200"/>
-                  </a:lnTo>
-                  <a:lnTo>
-                    <a:pt x="315099" y="302310"/>
-                  </a:lnTo>
-                  <a:lnTo>
-                    <a:pt x="314388" y="302310"/>
-                  </a:lnTo>
-                  <a:lnTo>
-                    <a:pt x="313613" y="301040"/>
-                  </a:lnTo>
-                  <a:lnTo>
-                    <a:pt x="306438" y="301040"/>
-                  </a:lnTo>
-                  <a:lnTo>
-                    <a:pt x="301561" y="306120"/>
-                  </a:lnTo>
-                  <a:lnTo>
-                    <a:pt x="301561" y="315010"/>
-                  </a:lnTo>
-                  <a:lnTo>
-                    <a:pt x="302158" y="316280"/>
-                  </a:lnTo>
-                  <a:lnTo>
-                    <a:pt x="303199" y="318820"/>
-                  </a:lnTo>
-                  <a:lnTo>
-                    <a:pt x="266014" y="367080"/>
-                  </a:lnTo>
-                  <a:lnTo>
-                    <a:pt x="271538" y="323900"/>
-                  </a:lnTo>
-                  <a:lnTo>
-                    <a:pt x="282879" y="308660"/>
-                  </a:lnTo>
-                  <a:lnTo>
-                    <a:pt x="306514" y="276910"/>
-                  </a:lnTo>
-                  <a:lnTo>
-                    <a:pt x="306514" y="252780"/>
-                  </a:lnTo>
-                  <a:lnTo>
-                    <a:pt x="306514" y="241350"/>
-                  </a:lnTo>
-                  <a:lnTo>
-                    <a:pt x="316547" y="227380"/>
-                  </a:lnTo>
-                  <a:lnTo>
-                    <a:pt x="320052" y="227380"/>
-                  </a:lnTo>
-                  <a:lnTo>
-                    <a:pt x="321614" y="231190"/>
-                  </a:lnTo>
-                  <a:lnTo>
-                    <a:pt x="325577" y="233730"/>
-                  </a:lnTo>
-                  <a:lnTo>
-                    <a:pt x="334848" y="233730"/>
-                  </a:lnTo>
-                  <a:lnTo>
-                    <a:pt x="338823" y="231190"/>
-                  </a:lnTo>
-                  <a:lnTo>
-                    <a:pt x="340385" y="227380"/>
-                  </a:lnTo>
-                  <a:lnTo>
-                    <a:pt x="356603" y="227380"/>
-                  </a:lnTo>
-                  <a:lnTo>
-                    <a:pt x="357974" y="231190"/>
-                  </a:lnTo>
-                  <a:lnTo>
-                    <a:pt x="361162" y="233730"/>
-                  </a:lnTo>
-                  <a:lnTo>
-                    <a:pt x="365023" y="233730"/>
-                  </a:lnTo>
-                  <a:lnTo>
-                    <a:pt x="365023" y="226110"/>
-                  </a:lnTo>
-                  <a:lnTo>
-                    <a:pt x="364312" y="226110"/>
-                  </a:lnTo>
-                  <a:lnTo>
-                    <a:pt x="363715" y="223570"/>
-                  </a:lnTo>
-                  <a:lnTo>
-                    <a:pt x="363639" y="221030"/>
-                  </a:lnTo>
-                  <a:lnTo>
-                    <a:pt x="365036" y="219760"/>
-                  </a:lnTo>
-                  <a:lnTo>
-                    <a:pt x="368147" y="219760"/>
-                  </a:lnTo>
-                  <a:lnTo>
-                    <a:pt x="369316" y="221030"/>
-                  </a:lnTo>
-                  <a:lnTo>
-                    <a:pt x="369862" y="222300"/>
-                  </a:lnTo>
-                  <a:lnTo>
-                    <a:pt x="369912" y="224840"/>
-                  </a:lnTo>
-                  <a:lnTo>
-                    <a:pt x="369912" y="212140"/>
-                  </a:lnTo>
-                  <a:lnTo>
-                    <a:pt x="362140" y="212140"/>
-                  </a:lnTo>
-                  <a:lnTo>
-                    <a:pt x="358165" y="215950"/>
-                  </a:lnTo>
-                  <a:lnTo>
-                    <a:pt x="356603" y="219760"/>
-                  </a:lnTo>
-                  <a:lnTo>
-                    <a:pt x="340385" y="219760"/>
-                  </a:lnTo>
-                  <a:lnTo>
-                    <a:pt x="338823" y="215950"/>
-                  </a:lnTo>
-                  <a:lnTo>
-                    <a:pt x="334860" y="212140"/>
-                  </a:lnTo>
-                  <a:lnTo>
-                    <a:pt x="333349" y="212140"/>
-                  </a:lnTo>
-                  <a:lnTo>
-                    <a:pt x="333349" y="221030"/>
-                  </a:lnTo>
-                  <a:lnTo>
-                    <a:pt x="333349" y="224840"/>
-                  </a:lnTo>
-                  <a:lnTo>
-                    <a:pt x="331952" y="226110"/>
-                  </a:lnTo>
-                  <a:lnTo>
-                    <a:pt x="328485" y="226110"/>
-                  </a:lnTo>
-                  <a:lnTo>
-                    <a:pt x="327075" y="224840"/>
-                  </a:lnTo>
-                  <a:lnTo>
-                    <a:pt x="327075" y="221030"/>
-                  </a:lnTo>
-                  <a:lnTo>
-                    <a:pt x="328485" y="219760"/>
-                  </a:lnTo>
-                  <a:lnTo>
-                    <a:pt x="331952" y="219760"/>
-                  </a:lnTo>
-                  <a:lnTo>
-                    <a:pt x="333349" y="221030"/>
-                  </a:lnTo>
-                  <a:lnTo>
-                    <a:pt x="333349" y="212140"/>
-                  </a:lnTo>
-                  <a:lnTo>
-                    <a:pt x="325577" y="212140"/>
-                  </a:lnTo>
-                  <a:lnTo>
-                    <a:pt x="321614" y="215950"/>
-                  </a:lnTo>
-                  <a:lnTo>
-                    <a:pt x="320052" y="219760"/>
-                  </a:lnTo>
-                  <a:lnTo>
-                    <a:pt x="312496" y="219760"/>
-                  </a:lnTo>
-                  <a:lnTo>
-                    <a:pt x="298780" y="239268"/>
-                  </a:lnTo>
-                  <a:lnTo>
-                    <a:pt x="298780" y="252780"/>
-                  </a:lnTo>
-                  <a:lnTo>
-                    <a:pt x="298780" y="274370"/>
-                  </a:lnTo>
-                  <a:lnTo>
-                    <a:pt x="273494" y="308660"/>
-                  </a:lnTo>
-                  <a:lnTo>
-                    <a:pt x="276440" y="284530"/>
-                  </a:lnTo>
-                  <a:lnTo>
-                    <a:pt x="288048" y="268020"/>
-                  </a:lnTo>
-                  <a:lnTo>
-                    <a:pt x="298780" y="252780"/>
-                  </a:lnTo>
-                  <a:lnTo>
-                    <a:pt x="298780" y="239268"/>
-                  </a:lnTo>
-                  <a:lnTo>
-                    <a:pt x="278549" y="268020"/>
-                  </a:lnTo>
-                  <a:lnTo>
-                    <a:pt x="283375" y="229920"/>
-                  </a:lnTo>
-                  <a:lnTo>
-                    <a:pt x="283895" y="229920"/>
-                  </a:lnTo>
-                  <a:lnTo>
-                    <a:pt x="286486" y="224840"/>
-                  </a:lnTo>
-                  <a:lnTo>
-                    <a:pt x="295681" y="209600"/>
-                  </a:lnTo>
-                  <a:lnTo>
-                    <a:pt x="296278" y="208330"/>
-                  </a:lnTo>
-                  <a:lnTo>
-                    <a:pt x="302628" y="200710"/>
-                  </a:lnTo>
-                  <a:lnTo>
-                    <a:pt x="310489" y="193090"/>
-                  </a:lnTo>
-                  <a:lnTo>
-                    <a:pt x="319608" y="189280"/>
-                  </a:lnTo>
-                  <a:lnTo>
-                    <a:pt x="329742" y="185470"/>
-                  </a:lnTo>
-                  <a:lnTo>
-                    <a:pt x="344500" y="185470"/>
-                  </a:lnTo>
-                  <a:lnTo>
-                    <a:pt x="345338" y="186740"/>
-                  </a:lnTo>
-                  <a:lnTo>
-                    <a:pt x="350761" y="186740"/>
-                  </a:lnTo>
-                  <a:lnTo>
-                    <a:pt x="351967" y="188010"/>
-                  </a:lnTo>
-                  <a:lnTo>
-                    <a:pt x="353999" y="188010"/>
-                  </a:lnTo>
-                  <a:lnTo>
-                    <a:pt x="355498" y="189280"/>
-                  </a:lnTo>
-                  <a:lnTo>
-                    <a:pt x="357200" y="189280"/>
-                  </a:lnTo>
-                  <a:lnTo>
-                    <a:pt x="358140" y="190550"/>
-                  </a:lnTo>
-                  <a:lnTo>
-                    <a:pt x="359956" y="190550"/>
-                  </a:lnTo>
-                  <a:lnTo>
-                    <a:pt x="361556" y="191820"/>
-                  </a:lnTo>
-                  <a:lnTo>
-                    <a:pt x="364261" y="193090"/>
-                  </a:lnTo>
-                  <a:lnTo>
-                    <a:pt x="365556" y="194360"/>
-                  </a:lnTo>
-                  <a:lnTo>
-                    <a:pt x="365721" y="194360"/>
-                  </a:lnTo>
-                  <a:lnTo>
-                    <a:pt x="368223" y="196900"/>
-                  </a:lnTo>
-                  <a:lnTo>
-                    <a:pt x="370192" y="198170"/>
-                  </a:lnTo>
-                  <a:lnTo>
-                    <a:pt x="371322" y="199440"/>
-                  </a:lnTo>
-                  <a:lnTo>
-                    <a:pt x="372579" y="200710"/>
-                  </a:lnTo>
-                  <a:lnTo>
-                    <a:pt x="374065" y="201980"/>
-                  </a:lnTo>
-                  <a:lnTo>
-                    <a:pt x="376072" y="204520"/>
-                  </a:lnTo>
-                  <a:lnTo>
-                    <a:pt x="377253" y="205790"/>
-                  </a:lnTo>
-                  <a:lnTo>
-                    <a:pt x="378180" y="207060"/>
-                  </a:lnTo>
-                  <a:lnTo>
-                    <a:pt x="379399" y="209600"/>
-                  </a:lnTo>
-                  <a:lnTo>
-                    <a:pt x="380936" y="212140"/>
-                  </a:lnTo>
-                  <a:lnTo>
-                    <a:pt x="381431" y="213410"/>
-                  </a:lnTo>
-                  <a:lnTo>
-                    <a:pt x="382193" y="214680"/>
-                  </a:lnTo>
-                  <a:lnTo>
-                    <a:pt x="383095" y="217220"/>
-                  </a:lnTo>
-                  <a:lnTo>
-                    <a:pt x="383857" y="218490"/>
-                  </a:lnTo>
-                  <a:lnTo>
-                    <a:pt x="384009" y="219760"/>
-                  </a:lnTo>
-                  <a:lnTo>
-                    <a:pt x="384009" y="202653"/>
-                  </a:lnTo>
-                  <a:lnTo>
-                    <a:pt x="379399" y="196900"/>
-                  </a:lnTo>
-                  <a:lnTo>
-                    <a:pt x="412661" y="196900"/>
-                  </a:lnTo>
-                  <a:lnTo>
-                    <a:pt x="427609" y="210870"/>
-                  </a:lnTo>
-                  <a:lnTo>
-                    <a:pt x="450735" y="210870"/>
-                  </a:lnTo>
-                  <a:lnTo>
-                    <a:pt x="451612" y="213410"/>
-                  </a:lnTo>
-                  <a:lnTo>
-                    <a:pt x="454596" y="219760"/>
-                  </a:lnTo>
-                  <a:lnTo>
-                    <a:pt x="457987" y="229920"/>
-                  </a:lnTo>
-                  <a:lnTo>
-                    <a:pt x="460717" y="245160"/>
-                  </a:lnTo>
-                  <a:lnTo>
-                    <a:pt x="461467" y="260400"/>
-                  </a:lnTo>
-                  <a:lnTo>
-                    <a:pt x="461530" y="261670"/>
-                  </a:lnTo>
-                  <a:lnTo>
-                    <a:pt x="461657" y="264210"/>
-                  </a:lnTo>
-                  <a:lnTo>
-                    <a:pt x="461721" y="265480"/>
-                  </a:lnTo>
-                  <a:lnTo>
-                    <a:pt x="461721" y="167386"/>
-                  </a:lnTo>
-                  <a:lnTo>
-                    <a:pt x="458038" y="163880"/>
-                  </a:lnTo>
-                  <a:lnTo>
-                    <a:pt x="451561" y="160070"/>
-                  </a:lnTo>
-                  <a:lnTo>
-                    <a:pt x="444461" y="158800"/>
-                  </a:lnTo>
-                  <a:lnTo>
-                    <a:pt x="437235" y="160070"/>
-                  </a:lnTo>
-                  <a:lnTo>
-                    <a:pt x="433412" y="161340"/>
-                  </a:lnTo>
-                  <a:lnTo>
-                    <a:pt x="430276" y="163880"/>
-                  </a:lnTo>
-                  <a:lnTo>
-                    <a:pt x="423405" y="167690"/>
-                  </a:lnTo>
-                  <a:lnTo>
-                    <a:pt x="446900" y="203250"/>
-                  </a:lnTo>
-                  <a:lnTo>
-                    <a:pt x="430974" y="203250"/>
-                  </a:lnTo>
-                  <a:lnTo>
-                    <a:pt x="424789" y="196900"/>
-                  </a:lnTo>
-                  <a:lnTo>
-                    <a:pt x="416153" y="188010"/>
-                  </a:lnTo>
-                  <a:lnTo>
-                    <a:pt x="370674" y="188010"/>
-                  </a:lnTo>
-                  <a:lnTo>
-                    <a:pt x="365747" y="185470"/>
-                  </a:lnTo>
-                  <a:lnTo>
-                    <a:pt x="363283" y="184200"/>
-                  </a:lnTo>
-                  <a:lnTo>
-                    <a:pt x="360603" y="182930"/>
-                  </a:lnTo>
-                  <a:lnTo>
-                    <a:pt x="355231" y="180390"/>
-                  </a:lnTo>
-                  <a:lnTo>
-                    <a:pt x="346595" y="177850"/>
-                  </a:lnTo>
-                  <a:lnTo>
-                    <a:pt x="329653" y="177850"/>
-                  </a:lnTo>
-                  <a:lnTo>
-                    <a:pt x="322084" y="179120"/>
-                  </a:lnTo>
-                  <a:lnTo>
-                    <a:pt x="315150" y="182930"/>
-                  </a:lnTo>
-                  <a:lnTo>
-                    <a:pt x="330606" y="167690"/>
-                  </a:lnTo>
-                  <a:lnTo>
-                    <a:pt x="309549" y="167690"/>
-                  </a:lnTo>
-                  <a:lnTo>
-                    <a:pt x="338086" y="138480"/>
-                  </a:lnTo>
-                  <a:lnTo>
-                    <a:pt x="298919" y="111810"/>
-                  </a:lnTo>
-                  <a:lnTo>
-                    <a:pt x="418452" y="111810"/>
-                  </a:lnTo>
-                  <a:lnTo>
-                    <a:pt x="421868" y="114350"/>
-                  </a:lnTo>
-                  <a:lnTo>
-                    <a:pt x="433768" y="125780"/>
-                  </a:lnTo>
-                  <a:lnTo>
-                    <a:pt x="448665" y="125780"/>
-                  </a:lnTo>
-                  <a:lnTo>
-                    <a:pt x="458952" y="127050"/>
-                  </a:lnTo>
-                  <a:lnTo>
-                    <a:pt x="469976" y="130860"/>
-                  </a:lnTo>
-                  <a:lnTo>
-                    <a:pt x="476745" y="139750"/>
-                  </a:lnTo>
-                  <a:lnTo>
-                    <a:pt x="476846" y="151180"/>
-                  </a:lnTo>
-                  <a:lnTo>
-                    <a:pt x="476846" y="33337"/>
-                  </a:lnTo>
-                  <a:lnTo>
-                    <a:pt x="379933" y="29260"/>
-                  </a:lnTo>
-                  <a:lnTo>
-                    <a:pt x="359117" y="29260"/>
-                  </a:lnTo>
-                  <a:lnTo>
-                    <a:pt x="297370" y="30530"/>
-                  </a:lnTo>
-                  <a:lnTo>
-                    <a:pt x="239839" y="34340"/>
-                  </a:lnTo>
-                  <a:lnTo>
-                    <a:pt x="187706" y="39420"/>
-                  </a:lnTo>
-                  <a:lnTo>
-                    <a:pt x="104330" y="53390"/>
-                  </a:lnTo>
-                  <a:lnTo>
-                    <a:pt x="104330" y="105460"/>
-                  </a:lnTo>
-                  <a:lnTo>
-                    <a:pt x="156489" y="105460"/>
-                  </a:lnTo>
-                  <a:lnTo>
-                    <a:pt x="156489" y="157530"/>
-                  </a:lnTo>
-                  <a:lnTo>
-                    <a:pt x="104330" y="157530"/>
-                  </a:lnTo>
-                  <a:lnTo>
-                    <a:pt x="104330" y="105460"/>
-                  </a:lnTo>
-                  <a:lnTo>
-                    <a:pt x="0" y="105460"/>
-                  </a:lnTo>
-                  <a:lnTo>
-                    <a:pt x="0" y="157530"/>
-                  </a:lnTo>
-                  <a:lnTo>
-                    <a:pt x="49110" y="157530"/>
-                  </a:lnTo>
-                  <a:lnTo>
-                    <a:pt x="49225" y="199440"/>
-                  </a:lnTo>
-                  <a:lnTo>
-                    <a:pt x="51181" y="241350"/>
-                  </a:lnTo>
-                  <a:lnTo>
-                    <a:pt x="51295" y="243890"/>
-                  </a:lnTo>
-                  <a:lnTo>
-                    <a:pt x="51409" y="246430"/>
-                  </a:lnTo>
-                  <a:lnTo>
-                    <a:pt x="58204" y="294690"/>
-                  </a:lnTo>
-                  <a:lnTo>
-                    <a:pt x="69278" y="341680"/>
-                  </a:lnTo>
-                  <a:lnTo>
-                    <a:pt x="84416" y="386130"/>
-                  </a:lnTo>
-                  <a:lnTo>
-                    <a:pt x="103416" y="429310"/>
-                  </a:lnTo>
-                  <a:lnTo>
-                    <a:pt x="126072" y="469950"/>
-                  </a:lnTo>
-                  <a:lnTo>
-                    <a:pt x="152171" y="509320"/>
-                  </a:lnTo>
-                  <a:lnTo>
-                    <a:pt x="181508" y="544880"/>
-                  </a:lnTo>
-                  <a:lnTo>
-                    <a:pt x="213868" y="579170"/>
-                  </a:lnTo>
-                  <a:lnTo>
-                    <a:pt x="249059" y="608380"/>
-                  </a:lnTo>
-                  <a:lnTo>
-                    <a:pt x="286880" y="636320"/>
-                  </a:lnTo>
-                  <a:lnTo>
-                    <a:pt x="327088" y="660450"/>
-                  </a:lnTo>
-                  <a:lnTo>
-                    <a:pt x="369519" y="679500"/>
-                  </a:lnTo>
-                  <a:lnTo>
-                    <a:pt x="411886" y="660450"/>
-                  </a:lnTo>
-                  <a:lnTo>
-                    <a:pt x="452056" y="636320"/>
-                  </a:lnTo>
-                  <a:lnTo>
-                    <a:pt x="489826" y="608380"/>
-                  </a:lnTo>
-                  <a:lnTo>
-                    <a:pt x="524979" y="579170"/>
-                  </a:lnTo>
-                  <a:lnTo>
-                    <a:pt x="557326" y="544880"/>
-                  </a:lnTo>
-                  <a:lnTo>
-                    <a:pt x="575132" y="523290"/>
-                  </a:lnTo>
-                  <a:lnTo>
-                    <a:pt x="581418" y="515670"/>
-                  </a:lnTo>
-                  <a:lnTo>
-                    <a:pt x="586651" y="509320"/>
-                  </a:lnTo>
-                  <a:lnTo>
-                    <a:pt x="595350" y="496620"/>
-                  </a:lnTo>
-                  <a:lnTo>
-                    <a:pt x="600570" y="489000"/>
-                  </a:lnTo>
-                  <a:lnTo>
-                    <a:pt x="612749" y="471220"/>
-                  </a:lnTo>
-                  <a:lnTo>
-                    <a:pt x="597382" y="471220"/>
-                  </a:lnTo>
-                  <a:lnTo>
-                    <a:pt x="597382" y="421690"/>
-                  </a:lnTo>
-                  <a:lnTo>
-                    <a:pt x="597382" y="419150"/>
-                  </a:lnTo>
-                  <a:lnTo>
-                    <a:pt x="640842" y="419150"/>
-                  </a:lnTo>
-                  <a:lnTo>
-                    <a:pt x="642924" y="414070"/>
-                  </a:lnTo>
-                  <a:lnTo>
-                    <a:pt x="658025" y="377240"/>
-                  </a:lnTo>
-                  <a:lnTo>
-                    <a:pt x="671715" y="334060"/>
-                  </a:lnTo>
-                  <a:lnTo>
-                    <a:pt x="681710" y="289610"/>
-                  </a:lnTo>
-                  <a:lnTo>
-                    <a:pt x="687844" y="243890"/>
-                  </a:lnTo>
-                  <a:lnTo>
-                    <a:pt x="688289" y="233730"/>
-                  </a:lnTo>
-                  <a:lnTo>
-                    <a:pt x="688403" y="231190"/>
-                  </a:lnTo>
-                  <a:lnTo>
-                    <a:pt x="688454" y="229920"/>
-                  </a:lnTo>
-                  <a:lnTo>
-                    <a:pt x="688568" y="227380"/>
-                  </a:lnTo>
-                  <a:lnTo>
-                    <a:pt x="688682" y="224840"/>
-                  </a:lnTo>
-                  <a:lnTo>
-                    <a:pt x="688797" y="222300"/>
-                  </a:lnTo>
-                  <a:lnTo>
-                    <a:pt x="688911" y="219760"/>
-                  </a:lnTo>
-                  <a:lnTo>
-                    <a:pt x="689025" y="217220"/>
-                  </a:lnTo>
-                  <a:lnTo>
-                    <a:pt x="689127" y="214680"/>
-                  </a:lnTo>
-                  <a:lnTo>
-                    <a:pt x="689241" y="212140"/>
-                  </a:lnTo>
-                  <a:lnTo>
-                    <a:pt x="689356" y="209600"/>
-                  </a:lnTo>
-                  <a:lnTo>
-                    <a:pt x="689470" y="207060"/>
-                  </a:lnTo>
-                  <a:lnTo>
-                    <a:pt x="689584" y="204520"/>
-                  </a:lnTo>
-                  <a:lnTo>
-                    <a:pt x="689635" y="203250"/>
-                  </a:lnTo>
-                  <a:lnTo>
-                    <a:pt x="689749" y="200710"/>
-                  </a:lnTo>
-                  <a:lnTo>
-                    <a:pt x="689864" y="198170"/>
-                  </a:lnTo>
-                  <a:lnTo>
-                    <a:pt x="689927" y="177850"/>
-                  </a:lnTo>
-                  <a:lnTo>
-                    <a:pt x="689927" y="111810"/>
-                  </a:lnTo>
-                  <a:lnTo>
-                    <a:pt x="689927" y="64820"/>
-                  </a:lnTo>
-                  <a:close/>
-                </a:path>
-                <a:path w="702310" h="680085">
-                  <a:moveTo>
-                    <a:pt x="701713" y="470217"/>
-                  </a:moveTo>
-                  <a:lnTo>
-                    <a:pt x="649554" y="470217"/>
-                  </a:lnTo>
-                  <a:lnTo>
-                    <a:pt x="649554" y="522376"/>
-                  </a:lnTo>
-                  <a:lnTo>
-                    <a:pt x="701713" y="522376"/>
-                  </a:lnTo>
-                  <a:lnTo>
-                    <a:pt x="701713" y="470217"/>
-                  </a:lnTo>
-                  <a:close/>
-                </a:path>
-              </a:pathLst>
-            </a:custGeom>
+          <a:custGeom>
+            <a:avLst/>
+            <a:gdLst/>
+            <a:ahLst/>
+            <a:cxnLst/>
+            <a:rect l="l" t="t" r="r" b="b"/>
+            <a:pathLst>
+              <a:path w="702310" h="680085">
+                <a:moveTo>
+                  <a:pt x="104330" y="0"/>
+                </a:moveTo>
+                <a:lnTo>
+                  <a:pt x="52171" y="0"/>
+                </a:lnTo>
+                <a:lnTo>
+                  <a:pt x="52171" y="52158"/>
+                </a:lnTo>
+                <a:lnTo>
+                  <a:pt x="104330" y="52158"/>
+                </a:lnTo>
+                <a:lnTo>
+                  <a:pt x="104330" y="0"/>
+                </a:lnTo>
+                <a:close/>
+              </a:path>
+              <a:path w="702310" h="680085">
+                <a:moveTo>
+                  <a:pt x="423557" y="126022"/>
+                </a:moveTo>
+                <a:lnTo>
+                  <a:pt x="385724" y="125590"/>
+                </a:lnTo>
+                <a:lnTo>
+                  <a:pt x="393319" y="127939"/>
+                </a:lnTo>
+                <a:lnTo>
+                  <a:pt x="404190" y="132054"/>
+                </a:lnTo>
+                <a:lnTo>
+                  <a:pt x="410108" y="134581"/>
+                </a:lnTo>
+                <a:lnTo>
+                  <a:pt x="412343" y="135585"/>
+                </a:lnTo>
+                <a:lnTo>
+                  <a:pt x="414934" y="132054"/>
+                </a:lnTo>
+                <a:lnTo>
+                  <a:pt x="418426" y="128917"/>
+                </a:lnTo>
+                <a:lnTo>
+                  <a:pt x="423557" y="126022"/>
+                </a:lnTo>
+                <a:close/>
+              </a:path>
+              <a:path w="702310" h="680085">
+                <a:moveTo>
+                  <a:pt x="649554" y="522376"/>
+                </a:moveTo>
+                <a:lnTo>
+                  <a:pt x="597382" y="522376"/>
+                </a:lnTo>
+                <a:lnTo>
+                  <a:pt x="597382" y="574548"/>
+                </a:lnTo>
+                <a:lnTo>
+                  <a:pt x="649554" y="574548"/>
+                </a:lnTo>
+                <a:lnTo>
+                  <a:pt x="649554" y="522376"/>
+                </a:lnTo>
+                <a:close/>
+              </a:path>
+              <a:path w="702310" h="680085">
+                <a:moveTo>
+                  <a:pt x="689927" y="64820"/>
+                </a:moveTo>
+                <a:lnTo>
+                  <a:pt x="665619" y="58470"/>
+                </a:lnTo>
+                <a:lnTo>
+                  <a:pt x="599287" y="47040"/>
+                </a:lnTo>
+                <a:lnTo>
+                  <a:pt x="500773" y="34340"/>
+                </a:lnTo>
+                <a:lnTo>
+                  <a:pt x="488454" y="33832"/>
+                </a:lnTo>
+                <a:lnTo>
+                  <a:pt x="488454" y="542340"/>
+                </a:lnTo>
+                <a:lnTo>
+                  <a:pt x="255054" y="542340"/>
+                </a:lnTo>
+                <a:lnTo>
+                  <a:pt x="256540" y="535990"/>
+                </a:lnTo>
+                <a:lnTo>
+                  <a:pt x="260591" y="529640"/>
+                </a:lnTo>
+                <a:lnTo>
+                  <a:pt x="266598" y="524560"/>
+                </a:lnTo>
+                <a:lnTo>
+                  <a:pt x="273977" y="523290"/>
+                </a:lnTo>
+                <a:lnTo>
+                  <a:pt x="469531" y="523290"/>
+                </a:lnTo>
+                <a:lnTo>
+                  <a:pt x="476897" y="524560"/>
+                </a:lnTo>
+                <a:lnTo>
+                  <a:pt x="482904" y="529640"/>
+                </a:lnTo>
+                <a:lnTo>
+                  <a:pt x="486956" y="535990"/>
+                </a:lnTo>
+                <a:lnTo>
+                  <a:pt x="488454" y="542340"/>
+                </a:lnTo>
+                <a:lnTo>
+                  <a:pt x="488454" y="33832"/>
+                </a:lnTo>
+                <a:lnTo>
+                  <a:pt x="477177" y="33350"/>
+                </a:lnTo>
+                <a:lnTo>
+                  <a:pt x="477177" y="515670"/>
+                </a:lnTo>
+                <a:lnTo>
+                  <a:pt x="266344" y="515670"/>
+                </a:lnTo>
+                <a:lnTo>
+                  <a:pt x="267830" y="508050"/>
+                </a:lnTo>
+                <a:lnTo>
+                  <a:pt x="271881" y="501700"/>
+                </a:lnTo>
+                <a:lnTo>
+                  <a:pt x="277888" y="497890"/>
+                </a:lnTo>
+                <a:lnTo>
+                  <a:pt x="285267" y="496620"/>
+                </a:lnTo>
+                <a:lnTo>
+                  <a:pt x="458241" y="496620"/>
+                </a:lnTo>
+                <a:lnTo>
+                  <a:pt x="465607" y="497890"/>
+                </a:lnTo>
+                <a:lnTo>
+                  <a:pt x="471627" y="501700"/>
+                </a:lnTo>
+                <a:lnTo>
+                  <a:pt x="475678" y="508050"/>
+                </a:lnTo>
+                <a:lnTo>
+                  <a:pt x="477177" y="515670"/>
+                </a:lnTo>
+                <a:lnTo>
+                  <a:pt x="477177" y="33350"/>
+                </a:lnTo>
+                <a:lnTo>
+                  <a:pt x="476846" y="33337"/>
+                </a:lnTo>
+                <a:lnTo>
+                  <a:pt x="476846" y="151180"/>
+                </a:lnTo>
+                <a:lnTo>
+                  <a:pt x="473252" y="163880"/>
+                </a:lnTo>
+                <a:lnTo>
+                  <a:pt x="468909" y="172770"/>
+                </a:lnTo>
+                <a:lnTo>
+                  <a:pt x="466813" y="177850"/>
+                </a:lnTo>
+                <a:lnTo>
+                  <a:pt x="466813" y="174040"/>
+                </a:lnTo>
+                <a:lnTo>
+                  <a:pt x="465886" y="172402"/>
+                </a:lnTo>
+                <a:lnTo>
+                  <a:pt x="465886" y="481380"/>
+                </a:lnTo>
+                <a:lnTo>
+                  <a:pt x="465886" y="489000"/>
+                </a:lnTo>
+                <a:lnTo>
+                  <a:pt x="277622" y="489000"/>
+                </a:lnTo>
+                <a:lnTo>
+                  <a:pt x="277622" y="481380"/>
+                </a:lnTo>
+                <a:lnTo>
+                  <a:pt x="281724" y="475030"/>
+                </a:lnTo>
+                <a:lnTo>
+                  <a:pt x="287731" y="471220"/>
+                </a:lnTo>
+                <a:lnTo>
+                  <a:pt x="298729" y="462330"/>
+                </a:lnTo>
+                <a:lnTo>
+                  <a:pt x="307251" y="450900"/>
+                </a:lnTo>
+                <a:lnTo>
+                  <a:pt x="312788" y="436930"/>
+                </a:lnTo>
+                <a:lnTo>
+                  <a:pt x="314782" y="421690"/>
+                </a:lnTo>
+                <a:lnTo>
+                  <a:pt x="428726" y="421690"/>
+                </a:lnTo>
+                <a:lnTo>
+                  <a:pt x="444766" y="462330"/>
+                </a:lnTo>
+                <a:lnTo>
+                  <a:pt x="461784" y="475030"/>
+                </a:lnTo>
+                <a:lnTo>
+                  <a:pt x="465886" y="481380"/>
+                </a:lnTo>
+                <a:lnTo>
+                  <a:pt x="465886" y="172402"/>
+                </a:lnTo>
+                <a:lnTo>
+                  <a:pt x="465378" y="171500"/>
+                </a:lnTo>
+                <a:lnTo>
+                  <a:pt x="463384" y="168960"/>
+                </a:lnTo>
+                <a:lnTo>
+                  <a:pt x="461721" y="167386"/>
+                </a:lnTo>
+                <a:lnTo>
+                  <a:pt x="461721" y="265480"/>
+                </a:lnTo>
+                <a:lnTo>
+                  <a:pt x="456336" y="303580"/>
+                </a:lnTo>
+                <a:lnTo>
+                  <a:pt x="445058" y="335330"/>
+                </a:lnTo>
+                <a:lnTo>
+                  <a:pt x="433895" y="369620"/>
+                </a:lnTo>
+                <a:lnTo>
+                  <a:pt x="428904" y="414070"/>
+                </a:lnTo>
+                <a:lnTo>
+                  <a:pt x="318681" y="414070"/>
+                </a:lnTo>
+                <a:lnTo>
+                  <a:pt x="362115" y="362000"/>
+                </a:lnTo>
+                <a:lnTo>
+                  <a:pt x="374840" y="346760"/>
+                </a:lnTo>
+                <a:lnTo>
+                  <a:pt x="376643" y="344220"/>
+                </a:lnTo>
+                <a:lnTo>
+                  <a:pt x="376643" y="275640"/>
+                </a:lnTo>
+                <a:lnTo>
+                  <a:pt x="384035" y="266750"/>
+                </a:lnTo>
+                <a:lnTo>
+                  <a:pt x="389496" y="256590"/>
+                </a:lnTo>
+                <a:lnTo>
+                  <a:pt x="392874" y="245160"/>
+                </a:lnTo>
+                <a:lnTo>
+                  <a:pt x="394030" y="233730"/>
+                </a:lnTo>
+                <a:lnTo>
+                  <a:pt x="393395" y="227380"/>
+                </a:lnTo>
+                <a:lnTo>
+                  <a:pt x="393268" y="226110"/>
+                </a:lnTo>
+                <a:lnTo>
+                  <a:pt x="393141" y="224840"/>
+                </a:lnTo>
+                <a:lnTo>
+                  <a:pt x="393014" y="223570"/>
+                </a:lnTo>
+                <a:lnTo>
+                  <a:pt x="390118" y="213410"/>
+                </a:lnTo>
+                <a:lnTo>
+                  <a:pt x="386283" y="206019"/>
+                </a:lnTo>
+                <a:lnTo>
+                  <a:pt x="386283" y="233730"/>
+                </a:lnTo>
+                <a:lnTo>
+                  <a:pt x="385051" y="245160"/>
+                </a:lnTo>
+                <a:lnTo>
+                  <a:pt x="381571" y="255320"/>
+                </a:lnTo>
+                <a:lnTo>
+                  <a:pt x="376097" y="264210"/>
+                </a:lnTo>
+                <a:lnTo>
+                  <a:pt x="368896" y="271830"/>
+                </a:lnTo>
+                <a:lnTo>
+                  <a:pt x="368896" y="341680"/>
+                </a:lnTo>
+                <a:lnTo>
+                  <a:pt x="351980" y="362000"/>
+                </a:lnTo>
+                <a:lnTo>
+                  <a:pt x="351980" y="266750"/>
+                </a:lnTo>
+                <a:lnTo>
+                  <a:pt x="360514" y="260400"/>
+                </a:lnTo>
+                <a:lnTo>
+                  <a:pt x="367068" y="254050"/>
+                </a:lnTo>
+                <a:lnTo>
+                  <a:pt x="371284" y="243890"/>
+                </a:lnTo>
+                <a:lnTo>
+                  <a:pt x="372770" y="233730"/>
+                </a:lnTo>
+                <a:lnTo>
+                  <a:pt x="372719" y="232460"/>
+                </a:lnTo>
+                <a:lnTo>
+                  <a:pt x="374624" y="231190"/>
+                </a:lnTo>
+                <a:lnTo>
+                  <a:pt x="376123" y="229920"/>
+                </a:lnTo>
+                <a:lnTo>
+                  <a:pt x="376948" y="227380"/>
+                </a:lnTo>
+                <a:lnTo>
+                  <a:pt x="385787" y="227380"/>
+                </a:lnTo>
+                <a:lnTo>
+                  <a:pt x="386118" y="229920"/>
+                </a:lnTo>
+                <a:lnTo>
+                  <a:pt x="386194" y="231190"/>
+                </a:lnTo>
+                <a:lnTo>
+                  <a:pt x="386283" y="233730"/>
+                </a:lnTo>
+                <a:lnTo>
+                  <a:pt x="386283" y="206019"/>
+                </a:lnTo>
+                <a:lnTo>
+                  <a:pt x="385508" y="204520"/>
+                </a:lnTo>
+                <a:lnTo>
+                  <a:pt x="384009" y="202653"/>
+                </a:lnTo>
+                <a:lnTo>
+                  <a:pt x="384009" y="219760"/>
+                </a:lnTo>
+                <a:lnTo>
+                  <a:pt x="376948" y="219760"/>
+                </a:lnTo>
+                <a:lnTo>
+                  <a:pt x="375386" y="215950"/>
+                </a:lnTo>
+                <a:lnTo>
+                  <a:pt x="371411" y="212140"/>
+                </a:lnTo>
+                <a:lnTo>
+                  <a:pt x="369912" y="212140"/>
+                </a:lnTo>
+                <a:lnTo>
+                  <a:pt x="369912" y="224840"/>
+                </a:lnTo>
+                <a:lnTo>
+                  <a:pt x="368515" y="226110"/>
+                </a:lnTo>
+                <a:lnTo>
+                  <a:pt x="365023" y="226110"/>
+                </a:lnTo>
+                <a:lnTo>
+                  <a:pt x="365023" y="233730"/>
+                </a:lnTo>
+                <a:lnTo>
+                  <a:pt x="363702" y="242620"/>
+                </a:lnTo>
+                <a:lnTo>
+                  <a:pt x="359994" y="250240"/>
+                </a:lnTo>
+                <a:lnTo>
+                  <a:pt x="354241" y="256590"/>
+                </a:lnTo>
+                <a:lnTo>
+                  <a:pt x="346811" y="260400"/>
+                </a:lnTo>
+                <a:lnTo>
+                  <a:pt x="344233" y="261670"/>
+                </a:lnTo>
+                <a:lnTo>
+                  <a:pt x="344233" y="370890"/>
+                </a:lnTo>
+                <a:lnTo>
+                  <a:pt x="315658" y="405180"/>
+                </a:lnTo>
+                <a:lnTo>
+                  <a:pt x="250583" y="489000"/>
+                </a:lnTo>
+                <a:lnTo>
+                  <a:pt x="256590" y="440740"/>
+                </a:lnTo>
+                <a:lnTo>
+                  <a:pt x="267512" y="426770"/>
+                </a:lnTo>
+                <a:lnTo>
+                  <a:pt x="309270" y="373430"/>
+                </a:lnTo>
+                <a:lnTo>
+                  <a:pt x="316903" y="373430"/>
+                </a:lnTo>
+                <a:lnTo>
+                  <a:pt x="317119" y="372160"/>
+                </a:lnTo>
+                <a:lnTo>
+                  <a:pt x="318300" y="372160"/>
+                </a:lnTo>
+                <a:lnTo>
+                  <a:pt x="319189" y="370890"/>
+                </a:lnTo>
+                <a:lnTo>
+                  <a:pt x="320141" y="370890"/>
+                </a:lnTo>
+                <a:lnTo>
+                  <a:pt x="320725" y="369620"/>
+                </a:lnTo>
+                <a:lnTo>
+                  <a:pt x="322173" y="368350"/>
+                </a:lnTo>
+                <a:lnTo>
+                  <a:pt x="322199" y="365810"/>
+                </a:lnTo>
+                <a:lnTo>
+                  <a:pt x="322275" y="359460"/>
+                </a:lnTo>
+                <a:lnTo>
+                  <a:pt x="322300" y="358190"/>
+                </a:lnTo>
+                <a:lnTo>
+                  <a:pt x="322122" y="358190"/>
+                </a:lnTo>
+                <a:lnTo>
+                  <a:pt x="321792" y="356920"/>
+                </a:lnTo>
+                <a:lnTo>
+                  <a:pt x="321221" y="356920"/>
+                </a:lnTo>
+                <a:lnTo>
+                  <a:pt x="320497" y="355650"/>
+                </a:lnTo>
+                <a:lnTo>
+                  <a:pt x="319227" y="354380"/>
+                </a:lnTo>
+                <a:lnTo>
+                  <a:pt x="318325" y="353110"/>
+                </a:lnTo>
+                <a:lnTo>
+                  <a:pt x="315887" y="353110"/>
+                </a:lnTo>
+                <a:lnTo>
+                  <a:pt x="315607" y="351840"/>
+                </a:lnTo>
+                <a:lnTo>
+                  <a:pt x="315582" y="360730"/>
+                </a:lnTo>
+                <a:lnTo>
+                  <a:pt x="315582" y="363270"/>
+                </a:lnTo>
+                <a:lnTo>
+                  <a:pt x="315341" y="364540"/>
+                </a:lnTo>
+                <a:lnTo>
+                  <a:pt x="314667" y="364540"/>
+                </a:lnTo>
+                <a:lnTo>
+                  <a:pt x="314515" y="365810"/>
+                </a:lnTo>
+                <a:lnTo>
+                  <a:pt x="310502" y="365810"/>
+                </a:lnTo>
+                <a:lnTo>
+                  <a:pt x="309791" y="364540"/>
+                </a:lnTo>
+                <a:lnTo>
+                  <a:pt x="309308" y="363270"/>
+                </a:lnTo>
+                <a:lnTo>
+                  <a:pt x="309308" y="362000"/>
+                </a:lnTo>
+                <a:lnTo>
+                  <a:pt x="309549" y="362000"/>
+                </a:lnTo>
+                <a:lnTo>
+                  <a:pt x="310540" y="360730"/>
+                </a:lnTo>
+                <a:lnTo>
+                  <a:pt x="311429" y="359460"/>
+                </a:lnTo>
+                <a:lnTo>
+                  <a:pt x="314172" y="359460"/>
+                </a:lnTo>
+                <a:lnTo>
+                  <a:pt x="315582" y="360730"/>
+                </a:lnTo>
+                <a:lnTo>
+                  <a:pt x="315582" y="351840"/>
+                </a:lnTo>
+                <a:lnTo>
+                  <a:pt x="306438" y="351840"/>
+                </a:lnTo>
+                <a:lnTo>
+                  <a:pt x="301561" y="356920"/>
+                </a:lnTo>
+                <a:lnTo>
+                  <a:pt x="301561" y="364540"/>
+                </a:lnTo>
+                <a:lnTo>
+                  <a:pt x="302133" y="367080"/>
+                </a:lnTo>
+                <a:lnTo>
+                  <a:pt x="303161" y="368350"/>
+                </a:lnTo>
+                <a:lnTo>
+                  <a:pt x="258521" y="426770"/>
+                </a:lnTo>
+                <a:lnTo>
+                  <a:pt x="264071" y="382320"/>
+                </a:lnTo>
+                <a:lnTo>
+                  <a:pt x="275628" y="367080"/>
+                </a:lnTo>
+                <a:lnTo>
+                  <a:pt x="309372" y="322630"/>
+                </a:lnTo>
+                <a:lnTo>
+                  <a:pt x="317627" y="322630"/>
+                </a:lnTo>
+                <a:lnTo>
+                  <a:pt x="317792" y="321360"/>
+                </a:lnTo>
+                <a:lnTo>
+                  <a:pt x="319481" y="321360"/>
+                </a:lnTo>
+                <a:lnTo>
+                  <a:pt x="320192" y="320090"/>
+                </a:lnTo>
+                <a:lnTo>
+                  <a:pt x="320700" y="320090"/>
+                </a:lnTo>
+                <a:lnTo>
+                  <a:pt x="321259" y="318820"/>
+                </a:lnTo>
+                <a:lnTo>
+                  <a:pt x="321564" y="318820"/>
+                </a:lnTo>
+                <a:lnTo>
+                  <a:pt x="322008" y="317550"/>
+                </a:lnTo>
+                <a:lnTo>
+                  <a:pt x="321970" y="315010"/>
+                </a:lnTo>
+                <a:lnTo>
+                  <a:pt x="321919" y="309930"/>
+                </a:lnTo>
+                <a:lnTo>
+                  <a:pt x="321894" y="307390"/>
+                </a:lnTo>
+                <a:lnTo>
+                  <a:pt x="321627" y="306120"/>
+                </a:lnTo>
+                <a:lnTo>
+                  <a:pt x="320992" y="306120"/>
+                </a:lnTo>
+                <a:lnTo>
+                  <a:pt x="320611" y="304850"/>
+                </a:lnTo>
+                <a:lnTo>
+                  <a:pt x="319633" y="304850"/>
+                </a:lnTo>
+                <a:lnTo>
+                  <a:pt x="319506" y="303580"/>
+                </a:lnTo>
+                <a:lnTo>
+                  <a:pt x="317957" y="303580"/>
+                </a:lnTo>
+                <a:lnTo>
+                  <a:pt x="316788" y="302310"/>
+                </a:lnTo>
+                <a:lnTo>
+                  <a:pt x="315099" y="302310"/>
+                </a:lnTo>
+                <a:lnTo>
+                  <a:pt x="315099" y="311200"/>
+                </a:lnTo>
+                <a:lnTo>
+                  <a:pt x="314998" y="313740"/>
+                </a:lnTo>
+                <a:lnTo>
+                  <a:pt x="314896" y="315010"/>
+                </a:lnTo>
+                <a:lnTo>
+                  <a:pt x="310718" y="315010"/>
+                </a:lnTo>
+                <a:lnTo>
+                  <a:pt x="309308" y="313740"/>
+                </a:lnTo>
+                <a:lnTo>
+                  <a:pt x="309308" y="312470"/>
+                </a:lnTo>
+                <a:lnTo>
+                  <a:pt x="309892" y="311200"/>
+                </a:lnTo>
+                <a:lnTo>
+                  <a:pt x="310362" y="309930"/>
+                </a:lnTo>
+                <a:lnTo>
+                  <a:pt x="314769" y="309930"/>
+                </a:lnTo>
+                <a:lnTo>
+                  <a:pt x="315099" y="311200"/>
+                </a:lnTo>
+                <a:lnTo>
+                  <a:pt x="315099" y="302310"/>
+                </a:lnTo>
+                <a:lnTo>
+                  <a:pt x="314388" y="302310"/>
+                </a:lnTo>
+                <a:lnTo>
+                  <a:pt x="313613" y="301040"/>
+                </a:lnTo>
+                <a:lnTo>
+                  <a:pt x="306438" y="301040"/>
+                </a:lnTo>
+                <a:lnTo>
+                  <a:pt x="301561" y="306120"/>
+                </a:lnTo>
+                <a:lnTo>
+                  <a:pt x="301561" y="315010"/>
+                </a:lnTo>
+                <a:lnTo>
+                  <a:pt x="302158" y="316280"/>
+                </a:lnTo>
+                <a:lnTo>
+                  <a:pt x="303199" y="318820"/>
+                </a:lnTo>
+                <a:lnTo>
+                  <a:pt x="266014" y="367080"/>
+                </a:lnTo>
+                <a:lnTo>
+                  <a:pt x="271538" y="323900"/>
+                </a:lnTo>
+                <a:lnTo>
+                  <a:pt x="282879" y="308660"/>
+                </a:lnTo>
+                <a:lnTo>
+                  <a:pt x="306514" y="276910"/>
+                </a:lnTo>
+                <a:lnTo>
+                  <a:pt x="306514" y="252780"/>
+                </a:lnTo>
+                <a:lnTo>
+                  <a:pt x="306514" y="241350"/>
+                </a:lnTo>
+                <a:lnTo>
+                  <a:pt x="316547" y="227380"/>
+                </a:lnTo>
+                <a:lnTo>
+                  <a:pt x="320052" y="227380"/>
+                </a:lnTo>
+                <a:lnTo>
+                  <a:pt x="321614" y="231190"/>
+                </a:lnTo>
+                <a:lnTo>
+                  <a:pt x="325577" y="233730"/>
+                </a:lnTo>
+                <a:lnTo>
+                  <a:pt x="334848" y="233730"/>
+                </a:lnTo>
+                <a:lnTo>
+                  <a:pt x="338823" y="231190"/>
+                </a:lnTo>
+                <a:lnTo>
+                  <a:pt x="340385" y="227380"/>
+                </a:lnTo>
+                <a:lnTo>
+                  <a:pt x="356603" y="227380"/>
+                </a:lnTo>
+                <a:lnTo>
+                  <a:pt x="357974" y="231190"/>
+                </a:lnTo>
+                <a:lnTo>
+                  <a:pt x="361162" y="233730"/>
+                </a:lnTo>
+                <a:lnTo>
+                  <a:pt x="365023" y="233730"/>
+                </a:lnTo>
+                <a:lnTo>
+                  <a:pt x="365023" y="226110"/>
+                </a:lnTo>
+                <a:lnTo>
+                  <a:pt x="364312" y="226110"/>
+                </a:lnTo>
+                <a:lnTo>
+                  <a:pt x="363715" y="223570"/>
+                </a:lnTo>
+                <a:lnTo>
+                  <a:pt x="363639" y="221030"/>
+                </a:lnTo>
+                <a:lnTo>
+                  <a:pt x="365036" y="219760"/>
+                </a:lnTo>
+                <a:lnTo>
+                  <a:pt x="368147" y="219760"/>
+                </a:lnTo>
+                <a:lnTo>
+                  <a:pt x="369316" y="221030"/>
+                </a:lnTo>
+                <a:lnTo>
+                  <a:pt x="369862" y="222300"/>
+                </a:lnTo>
+                <a:lnTo>
+                  <a:pt x="369912" y="224840"/>
+                </a:lnTo>
+                <a:lnTo>
+                  <a:pt x="369912" y="212140"/>
+                </a:lnTo>
+                <a:lnTo>
+                  <a:pt x="362140" y="212140"/>
+                </a:lnTo>
+                <a:lnTo>
+                  <a:pt x="358165" y="215950"/>
+                </a:lnTo>
+                <a:lnTo>
+                  <a:pt x="356603" y="219760"/>
+                </a:lnTo>
+                <a:lnTo>
+                  <a:pt x="340385" y="219760"/>
+                </a:lnTo>
+                <a:lnTo>
+                  <a:pt x="338823" y="215950"/>
+                </a:lnTo>
+                <a:lnTo>
+                  <a:pt x="334860" y="212140"/>
+                </a:lnTo>
+                <a:lnTo>
+                  <a:pt x="333349" y="212140"/>
+                </a:lnTo>
+                <a:lnTo>
+                  <a:pt x="333349" y="221030"/>
+                </a:lnTo>
+                <a:lnTo>
+                  <a:pt x="333349" y="224840"/>
+                </a:lnTo>
+                <a:lnTo>
+                  <a:pt x="331952" y="226110"/>
+                </a:lnTo>
+                <a:lnTo>
+                  <a:pt x="328485" y="226110"/>
+                </a:lnTo>
+                <a:lnTo>
+                  <a:pt x="327075" y="224840"/>
+                </a:lnTo>
+                <a:lnTo>
+                  <a:pt x="327075" y="221030"/>
+                </a:lnTo>
+                <a:lnTo>
+                  <a:pt x="328485" y="219760"/>
+                </a:lnTo>
+                <a:lnTo>
+                  <a:pt x="331952" y="219760"/>
+                </a:lnTo>
+                <a:lnTo>
+                  <a:pt x="333349" y="221030"/>
+                </a:lnTo>
+                <a:lnTo>
+                  <a:pt x="333349" y="212140"/>
+                </a:lnTo>
+                <a:lnTo>
+                  <a:pt x="325577" y="212140"/>
+                </a:lnTo>
+                <a:lnTo>
+                  <a:pt x="321614" y="215950"/>
+                </a:lnTo>
+                <a:lnTo>
+                  <a:pt x="320052" y="219760"/>
+                </a:lnTo>
+                <a:lnTo>
+                  <a:pt x="312496" y="219760"/>
+                </a:lnTo>
+                <a:lnTo>
+                  <a:pt x="298780" y="239268"/>
+                </a:lnTo>
+                <a:lnTo>
+                  <a:pt x="298780" y="252780"/>
+                </a:lnTo>
+                <a:lnTo>
+                  <a:pt x="298780" y="274370"/>
+                </a:lnTo>
+                <a:lnTo>
+                  <a:pt x="273494" y="308660"/>
+                </a:lnTo>
+                <a:lnTo>
+                  <a:pt x="276440" y="284530"/>
+                </a:lnTo>
+                <a:lnTo>
+                  <a:pt x="288048" y="268020"/>
+                </a:lnTo>
+                <a:lnTo>
+                  <a:pt x="298780" y="252780"/>
+                </a:lnTo>
+                <a:lnTo>
+                  <a:pt x="298780" y="239268"/>
+                </a:lnTo>
+                <a:lnTo>
+                  <a:pt x="278549" y="268020"/>
+                </a:lnTo>
+                <a:lnTo>
+                  <a:pt x="283375" y="229920"/>
+                </a:lnTo>
+                <a:lnTo>
+                  <a:pt x="283895" y="229920"/>
+                </a:lnTo>
+                <a:lnTo>
+                  <a:pt x="286486" y="224840"/>
+                </a:lnTo>
+                <a:lnTo>
+                  <a:pt x="295681" y="209600"/>
+                </a:lnTo>
+                <a:lnTo>
+                  <a:pt x="296278" y="208330"/>
+                </a:lnTo>
+                <a:lnTo>
+                  <a:pt x="302628" y="200710"/>
+                </a:lnTo>
+                <a:lnTo>
+                  <a:pt x="310489" y="193090"/>
+                </a:lnTo>
+                <a:lnTo>
+                  <a:pt x="319608" y="189280"/>
+                </a:lnTo>
+                <a:lnTo>
+                  <a:pt x="329742" y="185470"/>
+                </a:lnTo>
+                <a:lnTo>
+                  <a:pt x="344500" y="185470"/>
+                </a:lnTo>
+                <a:lnTo>
+                  <a:pt x="345338" y="186740"/>
+                </a:lnTo>
+                <a:lnTo>
+                  <a:pt x="350761" y="186740"/>
+                </a:lnTo>
+                <a:lnTo>
+                  <a:pt x="351967" y="188010"/>
+                </a:lnTo>
+                <a:lnTo>
+                  <a:pt x="353999" y="188010"/>
+                </a:lnTo>
+                <a:lnTo>
+                  <a:pt x="355498" y="189280"/>
+                </a:lnTo>
+                <a:lnTo>
+                  <a:pt x="357200" y="189280"/>
+                </a:lnTo>
+                <a:lnTo>
+                  <a:pt x="358140" y="190550"/>
+                </a:lnTo>
+                <a:lnTo>
+                  <a:pt x="359956" y="190550"/>
+                </a:lnTo>
+                <a:lnTo>
+                  <a:pt x="361556" y="191820"/>
+                </a:lnTo>
+                <a:lnTo>
+                  <a:pt x="364261" y="193090"/>
+                </a:lnTo>
+                <a:lnTo>
+                  <a:pt x="365556" y="194360"/>
+                </a:lnTo>
+                <a:lnTo>
+                  <a:pt x="365721" y="194360"/>
+                </a:lnTo>
+                <a:lnTo>
+                  <a:pt x="368223" y="196900"/>
+                </a:lnTo>
+                <a:lnTo>
+                  <a:pt x="370192" y="198170"/>
+                </a:lnTo>
+                <a:lnTo>
+                  <a:pt x="371322" y="199440"/>
+                </a:lnTo>
+                <a:lnTo>
+                  <a:pt x="372579" y="200710"/>
+                </a:lnTo>
+                <a:lnTo>
+                  <a:pt x="374065" y="201980"/>
+                </a:lnTo>
+                <a:lnTo>
+                  <a:pt x="376072" y="204520"/>
+                </a:lnTo>
+                <a:lnTo>
+                  <a:pt x="377253" y="205790"/>
+                </a:lnTo>
+                <a:lnTo>
+                  <a:pt x="378180" y="207060"/>
+                </a:lnTo>
+                <a:lnTo>
+                  <a:pt x="379399" y="209600"/>
+                </a:lnTo>
+                <a:lnTo>
+                  <a:pt x="380936" y="212140"/>
+                </a:lnTo>
+                <a:lnTo>
+                  <a:pt x="381431" y="213410"/>
+                </a:lnTo>
+                <a:lnTo>
+                  <a:pt x="382193" y="214680"/>
+                </a:lnTo>
+                <a:lnTo>
+                  <a:pt x="383095" y="217220"/>
+                </a:lnTo>
+                <a:lnTo>
+                  <a:pt x="383857" y="218490"/>
+                </a:lnTo>
+                <a:lnTo>
+                  <a:pt x="384009" y="219760"/>
+                </a:lnTo>
+                <a:lnTo>
+                  <a:pt x="384009" y="202653"/>
+                </a:lnTo>
+                <a:lnTo>
+                  <a:pt x="379399" y="196900"/>
+                </a:lnTo>
+                <a:lnTo>
+                  <a:pt x="412661" y="196900"/>
+                </a:lnTo>
+                <a:lnTo>
+                  <a:pt x="427609" y="210870"/>
+                </a:lnTo>
+                <a:lnTo>
+                  <a:pt x="450735" y="210870"/>
+                </a:lnTo>
+                <a:lnTo>
+                  <a:pt x="451612" y="213410"/>
+                </a:lnTo>
+                <a:lnTo>
+                  <a:pt x="454596" y="219760"/>
+                </a:lnTo>
+                <a:lnTo>
+                  <a:pt x="457987" y="229920"/>
+                </a:lnTo>
+                <a:lnTo>
+                  <a:pt x="460717" y="245160"/>
+                </a:lnTo>
+                <a:lnTo>
+                  <a:pt x="461467" y="260400"/>
+                </a:lnTo>
+                <a:lnTo>
+                  <a:pt x="461530" y="261670"/>
+                </a:lnTo>
+                <a:lnTo>
+                  <a:pt x="461657" y="264210"/>
+                </a:lnTo>
+                <a:lnTo>
+                  <a:pt x="461721" y="265480"/>
+                </a:lnTo>
+                <a:lnTo>
+                  <a:pt x="461721" y="167386"/>
+                </a:lnTo>
+                <a:lnTo>
+                  <a:pt x="458038" y="163880"/>
+                </a:lnTo>
+                <a:lnTo>
+                  <a:pt x="451561" y="160070"/>
+                </a:lnTo>
+                <a:lnTo>
+                  <a:pt x="444461" y="158800"/>
+                </a:lnTo>
+                <a:lnTo>
+                  <a:pt x="437235" y="160070"/>
+                </a:lnTo>
+                <a:lnTo>
+                  <a:pt x="433412" y="161340"/>
+                </a:lnTo>
+                <a:lnTo>
+                  <a:pt x="430276" y="163880"/>
+                </a:lnTo>
+                <a:lnTo>
+                  <a:pt x="423405" y="167690"/>
+                </a:lnTo>
+                <a:lnTo>
+                  <a:pt x="446900" y="203250"/>
+                </a:lnTo>
+                <a:lnTo>
+                  <a:pt x="430974" y="203250"/>
+                </a:lnTo>
+                <a:lnTo>
+                  <a:pt x="424789" y="196900"/>
+                </a:lnTo>
+                <a:lnTo>
+                  <a:pt x="416153" y="188010"/>
+                </a:lnTo>
+                <a:lnTo>
+                  <a:pt x="370674" y="188010"/>
+                </a:lnTo>
+                <a:lnTo>
+                  <a:pt x="365747" y="185470"/>
+                </a:lnTo>
+                <a:lnTo>
+                  <a:pt x="363283" y="184200"/>
+                </a:lnTo>
+                <a:lnTo>
+                  <a:pt x="360603" y="182930"/>
+                </a:lnTo>
+                <a:lnTo>
+                  <a:pt x="355231" y="180390"/>
+                </a:lnTo>
+                <a:lnTo>
+                  <a:pt x="346595" y="177850"/>
+                </a:lnTo>
+                <a:lnTo>
+                  <a:pt x="329653" y="177850"/>
+                </a:lnTo>
+                <a:lnTo>
+                  <a:pt x="322084" y="179120"/>
+                </a:lnTo>
+                <a:lnTo>
+                  <a:pt x="315150" y="182930"/>
+                </a:lnTo>
+                <a:lnTo>
+                  <a:pt x="330606" y="167690"/>
+                </a:lnTo>
+                <a:lnTo>
+                  <a:pt x="309549" y="167690"/>
+                </a:lnTo>
+                <a:lnTo>
+                  <a:pt x="338086" y="138480"/>
+                </a:lnTo>
+                <a:lnTo>
+                  <a:pt x="298919" y="111810"/>
+                </a:lnTo>
+                <a:lnTo>
+                  <a:pt x="418452" y="111810"/>
+                </a:lnTo>
+                <a:lnTo>
+                  <a:pt x="421868" y="114350"/>
+                </a:lnTo>
+                <a:lnTo>
+                  <a:pt x="433768" y="125780"/>
+                </a:lnTo>
+                <a:lnTo>
+                  <a:pt x="448665" y="125780"/>
+                </a:lnTo>
+                <a:lnTo>
+                  <a:pt x="458952" y="127050"/>
+                </a:lnTo>
+                <a:lnTo>
+                  <a:pt x="469976" y="130860"/>
+                </a:lnTo>
+                <a:lnTo>
+                  <a:pt x="476745" y="139750"/>
+                </a:lnTo>
+                <a:lnTo>
+                  <a:pt x="476846" y="151180"/>
+                </a:lnTo>
+                <a:lnTo>
+                  <a:pt x="476846" y="33337"/>
+                </a:lnTo>
+                <a:lnTo>
+                  <a:pt x="379933" y="29260"/>
+                </a:lnTo>
+                <a:lnTo>
+                  <a:pt x="359117" y="29260"/>
+                </a:lnTo>
+                <a:lnTo>
+                  <a:pt x="297370" y="30530"/>
+                </a:lnTo>
+                <a:lnTo>
+                  <a:pt x="239839" y="34340"/>
+                </a:lnTo>
+                <a:lnTo>
+                  <a:pt x="187706" y="39420"/>
+                </a:lnTo>
+                <a:lnTo>
+                  <a:pt x="104330" y="53390"/>
+                </a:lnTo>
+                <a:lnTo>
+                  <a:pt x="104330" y="105460"/>
+                </a:lnTo>
+                <a:lnTo>
+                  <a:pt x="156489" y="105460"/>
+                </a:lnTo>
+                <a:lnTo>
+                  <a:pt x="156489" y="157530"/>
+                </a:lnTo>
+                <a:lnTo>
+                  <a:pt x="104330" y="157530"/>
+                </a:lnTo>
+                <a:lnTo>
+                  <a:pt x="104330" y="105460"/>
+                </a:lnTo>
+                <a:lnTo>
+                  <a:pt x="0" y="105460"/>
+                </a:lnTo>
+                <a:lnTo>
+                  <a:pt x="0" y="157530"/>
+                </a:lnTo>
+                <a:lnTo>
+                  <a:pt x="49110" y="157530"/>
+                </a:lnTo>
+                <a:lnTo>
+                  <a:pt x="49225" y="199440"/>
+                </a:lnTo>
+                <a:lnTo>
+                  <a:pt x="51181" y="241350"/>
+                </a:lnTo>
+                <a:lnTo>
+                  <a:pt x="51295" y="243890"/>
+                </a:lnTo>
+                <a:lnTo>
+                  <a:pt x="51409" y="246430"/>
+                </a:lnTo>
+                <a:lnTo>
+                  <a:pt x="58204" y="294690"/>
+                </a:lnTo>
+                <a:lnTo>
+                  <a:pt x="69278" y="341680"/>
+                </a:lnTo>
+                <a:lnTo>
+                  <a:pt x="84416" y="386130"/>
+                </a:lnTo>
+                <a:lnTo>
+                  <a:pt x="103416" y="429310"/>
+                </a:lnTo>
+                <a:lnTo>
+                  <a:pt x="126072" y="469950"/>
+                </a:lnTo>
+                <a:lnTo>
+                  <a:pt x="152171" y="509320"/>
+                </a:lnTo>
+                <a:lnTo>
+                  <a:pt x="181508" y="544880"/>
+                </a:lnTo>
+                <a:lnTo>
+                  <a:pt x="213868" y="579170"/>
+                </a:lnTo>
+                <a:lnTo>
+                  <a:pt x="249059" y="608380"/>
+                </a:lnTo>
+                <a:lnTo>
+                  <a:pt x="286880" y="636320"/>
+                </a:lnTo>
+                <a:lnTo>
+                  <a:pt x="327088" y="660450"/>
+                </a:lnTo>
+                <a:lnTo>
+                  <a:pt x="369519" y="679500"/>
+                </a:lnTo>
+                <a:lnTo>
+                  <a:pt x="411886" y="660450"/>
+                </a:lnTo>
+                <a:lnTo>
+                  <a:pt x="452056" y="636320"/>
+                </a:lnTo>
+                <a:lnTo>
+                  <a:pt x="489826" y="608380"/>
+                </a:lnTo>
+                <a:lnTo>
+                  <a:pt x="524979" y="579170"/>
+                </a:lnTo>
+                <a:lnTo>
+                  <a:pt x="557326" y="544880"/>
+                </a:lnTo>
+                <a:lnTo>
+                  <a:pt x="575132" y="523290"/>
+                </a:lnTo>
+                <a:lnTo>
+                  <a:pt x="581418" y="515670"/>
+                </a:lnTo>
+                <a:lnTo>
+                  <a:pt x="586651" y="509320"/>
+                </a:lnTo>
+                <a:lnTo>
+                  <a:pt x="595350" y="496620"/>
+                </a:lnTo>
+                <a:lnTo>
+                  <a:pt x="600570" y="489000"/>
+                </a:lnTo>
+                <a:lnTo>
+                  <a:pt x="612749" y="471220"/>
+                </a:lnTo>
+                <a:lnTo>
+                  <a:pt x="597382" y="471220"/>
+                </a:lnTo>
+                <a:lnTo>
+                  <a:pt x="597382" y="421690"/>
+                </a:lnTo>
+                <a:lnTo>
+                  <a:pt x="597382" y="419150"/>
+                </a:lnTo>
+                <a:lnTo>
+                  <a:pt x="640842" y="419150"/>
+                </a:lnTo>
+                <a:lnTo>
+                  <a:pt x="642924" y="414070"/>
+                </a:lnTo>
+                <a:lnTo>
+                  <a:pt x="658025" y="377240"/>
+                </a:lnTo>
+                <a:lnTo>
+                  <a:pt x="671715" y="334060"/>
+                </a:lnTo>
+                <a:lnTo>
+                  <a:pt x="681710" y="289610"/>
+                </a:lnTo>
+                <a:lnTo>
+                  <a:pt x="687844" y="243890"/>
+                </a:lnTo>
+                <a:lnTo>
+                  <a:pt x="688289" y="233730"/>
+                </a:lnTo>
+                <a:lnTo>
+                  <a:pt x="688403" y="231190"/>
+                </a:lnTo>
+                <a:lnTo>
+                  <a:pt x="688454" y="229920"/>
+                </a:lnTo>
+                <a:lnTo>
+                  <a:pt x="688568" y="227380"/>
+                </a:lnTo>
+                <a:lnTo>
+                  <a:pt x="688682" y="224840"/>
+                </a:lnTo>
+                <a:lnTo>
+                  <a:pt x="688797" y="222300"/>
+                </a:lnTo>
+                <a:lnTo>
+                  <a:pt x="688911" y="219760"/>
+                </a:lnTo>
+                <a:lnTo>
+                  <a:pt x="689025" y="217220"/>
+                </a:lnTo>
+                <a:lnTo>
+                  <a:pt x="689127" y="214680"/>
+                </a:lnTo>
+                <a:lnTo>
+                  <a:pt x="689241" y="212140"/>
+                </a:lnTo>
+                <a:lnTo>
+                  <a:pt x="689356" y="209600"/>
+                </a:lnTo>
+                <a:lnTo>
+                  <a:pt x="689470" y="207060"/>
+                </a:lnTo>
+                <a:lnTo>
+                  <a:pt x="689584" y="204520"/>
+                </a:lnTo>
+                <a:lnTo>
+                  <a:pt x="689635" y="203250"/>
+                </a:lnTo>
+                <a:lnTo>
+                  <a:pt x="689749" y="200710"/>
+                </a:lnTo>
+                <a:lnTo>
+                  <a:pt x="689864" y="198170"/>
+                </a:lnTo>
+                <a:lnTo>
+                  <a:pt x="689927" y="177850"/>
+                </a:lnTo>
+                <a:lnTo>
+                  <a:pt x="689927" y="111810"/>
+                </a:lnTo>
+                <a:lnTo>
+                  <a:pt x="689927" y="64820"/>
+                </a:lnTo>
+                <a:close/>
+              </a:path>
+              <a:path w="702310" h="680085">
+                <a:moveTo>
+                  <a:pt x="701713" y="470217"/>
+                </a:moveTo>
+                <a:lnTo>
+                  <a:pt x="649554" y="470217"/>
+                </a:lnTo>
+                <a:lnTo>
+                  <a:pt x="649554" y="522376"/>
+                </a:lnTo>
+                <a:lnTo>
+                  <a:pt x="701713" y="522376"/>
+                </a:lnTo>
+                <a:lnTo>
+                  <a:pt x="701713" y="470217"/>
+                </a:lnTo>
+                <a:close/>
+              </a:path>
+            </a:pathLst>
+          </a:custGeom>
+          <a:solidFill>
+            <a:srgbClr val="FFFFFF">
+              <a:alpha val="79998"/>
+            </a:srgbClr>
+          </a:solidFill>
+        </p:spPr>
+        <p:txBody>
+          <a:bodyPr wrap="square" lIns="0" tIns="0" rIns="0" bIns="0" rtlCol="0"/>
+          <a:lstStyle/>
+          <a:p>
+            <a:endParaRPr/>
+          </a:p>
+        </p:txBody>
+      </p:sp>
+      <p:pic>
+        <p:nvPicPr>
+          <p:cNvPr id="18" name="object 18"/>
+          <p:cNvPicPr/>
+          <p:nvPr/>
+        </p:nvPicPr>
+        <p:blipFill>
+          <a:blip r:embed="rId7" cstate="print"/>
+          <a:stretch>
+            <a:fillRect/>
+          </a:stretch>
+        </p:blipFill>
+        <p:spPr>
+          <a:xfrm>
+            <a:off x="5174609" y="1957355"/>
+            <a:ext cx="2022972" cy="336331"/>
+          </a:xfrm>
+          <a:prstGeom prst="rect">
+            <a:avLst/>
+          </a:prstGeom>
+        </p:spPr>
+      </p:pic>
+      <p:sp>
+        <p:nvSpPr>
+          <p:cNvPr id="19" name="object 19"/>
+          <p:cNvSpPr/>
+          <p:nvPr/>
+        </p:nvSpPr>
+        <p:spPr>
+          <a:xfrm>
+            <a:off x="4159608" y="5740400"/>
+            <a:ext cx="6920865" cy="0"/>
+          </a:xfrm>
+          <a:custGeom>
+            <a:avLst/>
+            <a:gdLst/>
+            <a:ahLst/>
+            <a:cxnLst/>
+            <a:rect l="l" t="t" r="r" b="b"/>
+            <a:pathLst>
+              <a:path w="6920865">
+                <a:moveTo>
+                  <a:pt x="0" y="0"/>
+                </a:moveTo>
+                <a:lnTo>
+                  <a:pt x="6920788" y="0"/>
+                </a:lnTo>
+              </a:path>
+            </a:pathLst>
+          </a:custGeom>
+          <a:ln w="12700">
             <a:solidFill>
-              <a:srgbClr val="FFFFFF">
-                <a:alpha val="79998"/>
-              </a:srgbClr>
+              <a:srgbClr val="FFFFFF"/>
             </a:solidFill>
-          </p:spPr>
-          <p:txBody>
-            <a:bodyPr wrap="square" lIns="0" tIns="0" rIns="0" bIns="0" rtlCol="0"/>
-            <a:lstStyle/>
-            <a:p>
-              <a:endParaRPr/>
-            </a:p>
-          </p:txBody>
-        </p:sp>
-        <p:pic>
-          <p:nvPicPr>
-            <p:cNvPr id="18" name="object 18"/>
-            <p:cNvPicPr/>
-            <p:nvPr/>
-          </p:nvPicPr>
-          <p:blipFill>
-            <a:blip r:embed="rId7" cstate="print"/>
-            <a:stretch>
-              <a:fillRect/>
-            </a:stretch>
-          </p:blipFill>
-          <p:spPr>
-            <a:xfrm>
-              <a:off x="5174609" y="1957355"/>
-              <a:ext cx="2022972" cy="336331"/>
-            </a:xfrm>
-            <a:prstGeom prst="rect">
-              <a:avLst/>
-            </a:prstGeom>
-          </p:spPr>
-        </p:pic>
-        <p:sp>
-          <p:nvSpPr>
-            <p:cNvPr id="19" name="object 19"/>
-            <p:cNvSpPr/>
-            <p:nvPr/>
-          </p:nvSpPr>
-          <p:spPr>
-            <a:xfrm>
-              <a:off x="4159608" y="5475108"/>
-              <a:ext cx="6920865" cy="0"/>
-            </a:xfrm>
-            <a:custGeom>
-              <a:avLst/>
-              <a:gdLst/>
-              <a:ahLst/>
-              <a:cxnLst/>
-              <a:rect l="l" t="t" r="r" b="b"/>
-              <a:pathLst>
-                <a:path w="6920865">
-                  <a:moveTo>
-                    <a:pt x="0" y="0"/>
-                  </a:moveTo>
-                  <a:lnTo>
-                    <a:pt x="6920788" y="0"/>
-                  </a:lnTo>
-                </a:path>
-              </a:pathLst>
-            </a:custGeom>
-            <a:ln w="12700">
-              <a:solidFill>
-                <a:srgbClr val="FFFFFF"/>
-              </a:solidFill>
-            </a:ln>
-          </p:spPr>
-          <p:txBody>
-            <a:bodyPr wrap="square" lIns="0" tIns="0" rIns="0" bIns="0" rtlCol="0"/>
-            <a:lstStyle/>
-            <a:p>
-              <a:endParaRPr/>
-            </a:p>
-          </p:txBody>
-        </p:sp>
-        <p:sp>
-          <p:nvSpPr>
-            <p:cNvPr id="20" name="object 20"/>
-            <p:cNvSpPr/>
-            <p:nvPr/>
-          </p:nvSpPr>
-          <p:spPr>
-            <a:xfrm>
-              <a:off x="7620000" y="1785767"/>
-              <a:ext cx="0" cy="680085"/>
-            </a:xfrm>
-            <a:custGeom>
-              <a:avLst/>
-              <a:gdLst/>
-              <a:ahLst/>
-              <a:cxnLst/>
-              <a:rect l="l" t="t" r="r" b="b"/>
-              <a:pathLst>
-                <a:path h="680085">
-                  <a:moveTo>
-                    <a:pt x="0" y="0"/>
-                  </a:moveTo>
-                  <a:lnTo>
-                    <a:pt x="0" y="679513"/>
-                  </a:lnTo>
-                </a:path>
-              </a:pathLst>
-            </a:custGeom>
-            <a:ln w="12700">
-              <a:solidFill>
-                <a:srgbClr val="FFFFFF"/>
-              </a:solidFill>
-            </a:ln>
-          </p:spPr>
-          <p:txBody>
-            <a:bodyPr wrap="square" lIns="0" tIns="0" rIns="0" bIns="0" rtlCol="0"/>
-            <a:lstStyle/>
-            <a:p>
-              <a:endParaRPr/>
-            </a:p>
-          </p:txBody>
-        </p:sp>
-      </p:grpSp>
+          </a:ln>
+        </p:spPr>
+        <p:txBody>
+          <a:bodyPr wrap="square" lIns="0" tIns="0" rIns="0" bIns="0" rtlCol="0"/>
+          <a:lstStyle/>
+          <a:p>
+            <a:endParaRPr/>
+          </a:p>
+        </p:txBody>
+      </p:sp>
+      <p:sp>
+        <p:nvSpPr>
+          <p:cNvPr id="20" name="object 20"/>
+          <p:cNvSpPr/>
+          <p:nvPr/>
+        </p:nvSpPr>
+        <p:spPr>
+          <a:xfrm>
+            <a:off x="7620000" y="1785767"/>
+            <a:ext cx="0" cy="680085"/>
+          </a:xfrm>
+          <a:custGeom>
+            <a:avLst/>
+            <a:gdLst/>
+            <a:ahLst/>
+            <a:cxnLst/>
+            <a:rect l="l" t="t" r="r" b="b"/>
+            <a:pathLst>
+              <a:path h="680085">
+                <a:moveTo>
+                  <a:pt x="0" y="0"/>
+                </a:moveTo>
+                <a:lnTo>
+                  <a:pt x="0" y="679513"/>
+                </a:lnTo>
+              </a:path>
+            </a:pathLst>
+          </a:custGeom>
+          <a:ln w="12700">
+            <a:solidFill>
+              <a:srgbClr val="FFFFFF"/>
+            </a:solidFill>
+          </a:ln>
+        </p:spPr>
+        <p:txBody>
+          <a:bodyPr wrap="square" lIns="0" tIns="0" rIns="0" bIns="0" rtlCol="0"/>
+          <a:lstStyle/>
+          <a:p>
+            <a:endParaRPr/>
+          </a:p>
+        </p:txBody>
+      </p:sp>
       <p:sp>
         <p:nvSpPr>
           <p:cNvPr id="22" name="Title 21">
@@ -7217,20 +7182,24 @@
         </p:nvSpPr>
         <p:spPr>
           <a:xfrm>
-            <a:off x="3284755" y="3240573"/>
-            <a:ext cx="8670489" cy="1308050"/>
+            <a:off x="3284755" y="3025428"/>
+            <a:ext cx="8670489" cy="2333972"/>
           </a:xfrm>
         </p:spPr>
         <p:txBody>
           <a:bodyPr/>
           <a:lstStyle/>
           <a:p>
-            <a:pPr algn="ctr"/>
+            <a:pPr algn="ctr">
+              <a:lnSpc>
+                <a:spcPts val="9100"/>
+              </a:lnSpc>
+            </a:pPr>
             <a:r>
               <a:rPr lang="en-US" sz="8500" dirty="0">
                 <a:latin typeface="Franklin Gothic Medium" panose="020B0603020102020204" pitchFamily="34" charset="0"/>
               </a:rPr>
-              <a:t>THE TRIPLE LINDY</a:t>
+              <a:t>RANSOMWARE RHAPSODY</a:t>
             </a:r>
           </a:p>
         </p:txBody>
@@ -13379,6 +13348,26 @@
 </file>
 
 <file path=customXml/item1.xml><?xml version="1.0" encoding="utf-8"?>
+<?mso-contentType ?>
+<FormTemplates xmlns="http://schemas.microsoft.com/sharepoint/v3/contenttype/forms">
+  <Display>DocumentLibraryForm</Display>
+  <Edit>DocumentLibraryForm</Edit>
+  <New>DocumentLibraryForm</New>
+</FormTemplates>
+</file>
+
+<file path=customXml/item2.xml><?xml version="1.0" encoding="utf-8"?>
+<p:properties xmlns:p="http://schemas.microsoft.com/office/2006/metadata/properties" xmlns:xsi="http://www.w3.org/2001/XMLSchema-instance" xmlns:pc="http://schemas.microsoft.com/office/infopath/2007/PartnerControls">
+  <documentManagement>
+    <lcf76f155ced4ddcb4097134ff3c332f xmlns="d9e7aefc-6499-4d81-8dea-4fd32035678b">
+      <Terms xmlns="http://schemas.microsoft.com/office/infopath/2007/PartnerControls"/>
+    </lcf76f155ced4ddcb4097134ff3c332f>
+    <TaxCatchAll xmlns="69d4d371-ec28-4fd6-9bcd-688a2ee09887" xsi:nil="true"/>
+  </documentManagement>
+</p:properties>
+</file>
+
+<file path=customXml/item3.xml><?xml version="1.0" encoding="utf-8"?>
 <ct:contentTypeSchema xmlns:ct="http://schemas.microsoft.com/office/2006/metadata/contentType" xmlns:ma="http://schemas.microsoft.com/office/2006/metadata/properties/metaAttributes" ct:_="" ma:_="" ma:contentTypeName="Document" ma:contentTypeID="0x01010034829D6796E5084AB71CC4F7F66EE878" ma:contentTypeVersion="12" ma:contentTypeDescription="Create a new document." ma:contentTypeScope="" ma:versionID="d7f17d649395563663be2ee5f975c1d7">
   <xsd:schema xmlns:xsd="http://www.w3.org/2001/XMLSchema" xmlns:xs="http://www.w3.org/2001/XMLSchema" xmlns:p="http://schemas.microsoft.com/office/2006/metadata/properties" xmlns:ns2="d9e7aefc-6499-4d81-8dea-4fd32035678b" xmlns:ns3="69d4d371-ec28-4fd6-9bcd-688a2ee09887" targetNamespace="http://schemas.microsoft.com/office/2006/metadata/properties" ma:root="true" ma:fieldsID="6404cfdf8616d7a5b23fa35be095a6b2" ns2:_="" ns3:_="">
     <xsd:import namespace="d9e7aefc-6499-4d81-8dea-4fd32035678b"/>
@@ -13579,41 +13568,10 @@
 </ct:contentTypeSchema>
 </file>
 
-<file path=customXml/item2.xml><?xml version="1.0" encoding="utf-8"?>
-<p:properties xmlns:p="http://schemas.microsoft.com/office/2006/metadata/properties" xmlns:xsi="http://www.w3.org/2001/XMLSchema-instance" xmlns:pc="http://schemas.microsoft.com/office/infopath/2007/PartnerControls">
-  <documentManagement>
-    <lcf76f155ced4ddcb4097134ff3c332f xmlns="d9e7aefc-6499-4d81-8dea-4fd32035678b">
-      <Terms xmlns="http://schemas.microsoft.com/office/infopath/2007/PartnerControls"/>
-    </lcf76f155ced4ddcb4097134ff3c332f>
-    <TaxCatchAll xmlns="69d4d371-ec28-4fd6-9bcd-688a2ee09887" xsi:nil="true"/>
-  </documentManagement>
-</p:properties>
-</file>
-
-<file path=customXml/item3.xml><?xml version="1.0" encoding="utf-8"?>
-<?mso-contentType ?>
-<FormTemplates xmlns="http://schemas.microsoft.com/sharepoint/v3/contenttype/forms">
-  <Display>DocumentLibraryForm</Display>
-  <Edit>DocumentLibraryForm</Edit>
-  <New>DocumentLibraryForm</New>
-</FormTemplates>
-</file>
-
 <file path=customXml/itemProps1.xml><?xml version="1.0" encoding="utf-8"?>
-<ds:datastoreItem xmlns:ds="http://schemas.openxmlformats.org/officeDocument/2006/customXml" ds:itemID="{0DC64E69-D0CB-4F02-80DB-12F95A43574E}">
+<ds:datastoreItem xmlns:ds="http://schemas.openxmlformats.org/officeDocument/2006/customXml" ds:itemID="{75AC1632-AFAE-4E2E-AB58-EE517B7A8CB7}">
   <ds:schemaRefs>
-    <ds:schemaRef ds:uri="http://schemas.microsoft.com/office/2006/metadata/contentType"/>
-    <ds:schemaRef ds:uri="http://schemas.microsoft.com/office/2006/metadata/properties/metaAttributes"/>
-    <ds:schemaRef ds:uri="http://www.w3.org/2001/XMLSchema"/>
-    <ds:schemaRef ds:uri="http://schemas.microsoft.com/office/2006/metadata/properties"/>
-    <ds:schemaRef ds:uri="d9e7aefc-6499-4d81-8dea-4fd32035678b"/>
-    <ds:schemaRef ds:uri="69d4d371-ec28-4fd6-9bcd-688a2ee09887"/>
-    <ds:schemaRef ds:uri="http://schemas.microsoft.com/office/2006/documentManagement/types"/>
-    <ds:schemaRef ds:uri="http://schemas.microsoft.com/office/infopath/2007/PartnerControls"/>
-    <ds:schemaRef ds:uri="http://schemas.openxmlformats.org/package/2006/metadata/core-properties"/>
-    <ds:schemaRef ds:uri="http://purl.org/dc/elements/1.1/"/>
-    <ds:schemaRef ds:uri="http://purl.org/dc/terms/"/>
-    <ds:schemaRef ds:uri="http://schemas.microsoft.com/internal/obd"/>
+    <ds:schemaRef ds:uri="http://schemas.microsoft.com/sharepoint/v3/contenttype/forms"/>
   </ds:schemaRefs>
 </ds:datastoreItem>
 </file>
@@ -13640,9 +13598,20 @@
 </file>
 
 <file path=customXml/itemProps3.xml><?xml version="1.0" encoding="utf-8"?>
-<ds:datastoreItem xmlns:ds="http://schemas.openxmlformats.org/officeDocument/2006/customXml" ds:itemID="{75AC1632-AFAE-4E2E-AB58-EE517B7A8CB7}">
+<ds:datastoreItem xmlns:ds="http://schemas.openxmlformats.org/officeDocument/2006/customXml" ds:itemID="{0DC64E69-D0CB-4F02-80DB-12F95A43574E}">
   <ds:schemaRefs>
-    <ds:schemaRef ds:uri="http://schemas.microsoft.com/sharepoint/v3/contenttype/forms"/>
+    <ds:schemaRef ds:uri="http://schemas.microsoft.com/office/2006/metadata/contentType"/>
+    <ds:schemaRef ds:uri="http://schemas.microsoft.com/office/2006/metadata/properties/metaAttributes"/>
+    <ds:schemaRef ds:uri="http://www.w3.org/2001/XMLSchema"/>
+    <ds:schemaRef ds:uri="http://schemas.microsoft.com/office/2006/metadata/properties"/>
+    <ds:schemaRef ds:uri="d9e7aefc-6499-4d81-8dea-4fd32035678b"/>
+    <ds:schemaRef ds:uri="69d4d371-ec28-4fd6-9bcd-688a2ee09887"/>
+    <ds:schemaRef ds:uri="http://schemas.microsoft.com/office/2006/documentManagement/types"/>
+    <ds:schemaRef ds:uri="http://schemas.microsoft.com/office/infopath/2007/PartnerControls"/>
+    <ds:schemaRef ds:uri="http://schemas.openxmlformats.org/package/2006/metadata/core-properties"/>
+    <ds:schemaRef ds:uri="http://purl.org/dc/elements/1.1/"/>
+    <ds:schemaRef ds:uri="http://purl.org/dc/terms/"/>
+    <ds:schemaRef ds:uri="http://schemas.microsoft.com/internal/obd"/>
   </ds:schemaRefs>
 </ds:datastoreItem>
 </file>
